--- a/docs/content/05-teaching-resources/slides/specialism/09-analysing-requirements-and-design-information.pptx
+++ b/docs/content/05-teaching-resources/slides/specialism/09-analysing-requirements-and-design-information.pptx
@@ -14,6 +14,10 @@
     <p:sldId id="262" r:id="rId14"/>
     <p:sldId id="263" r:id="rId15"/>
     <p:sldId id="264" r:id="rId16"/>
+    <p:sldId id="265" r:id="rId17"/>
+    <p:sldId id="266" r:id="rId18"/>
+    <p:sldId id="267" r:id="rId19"/>
+    <p:sldId id="268" r:id="rId20"/>
   </p:sldIdLst>
   <p:sldSz cx="12191695" cy="6858000" type="screen4x3"/>
   <p:notesSz cx="6858000" cy="9144000"/>
@@ -510,7 +514,22 @@
           <a:lstStyle/>
           <a:p>
             <a:r>
-              <a:t>Give students a few minutes to answer on mini whiteboards or paper, then reveal the answers on the next slide.</a:t>
+              <a:t>Answers:</a:t>
+            </a:r>
+          </a:p>
+          <a:p>
+            <a:r>
+              <a:t>1. Uncontrolled growth in requirements.</a:t>
+            </a:r>
+          </a:p>
+          <a:p>
+            <a:r>
+              <a:t>2. A redesign forced by manufacturing limits.</a:t>
+            </a:r>
+          </a:p>
+          <a:p>
+            <a:r>
+              <a:t>3. It's recorded, assessed and agreed.</a:t>
             </a:r>
           </a:p>
         </p:txBody>
@@ -580,7 +599,22 @@
           <a:lstStyle/>
           <a:p>
             <a:r>
-              <a:t>Talk through any answers the class found difficult.</a:t>
+              <a:t>Answers:</a:t>
+            </a:r>
+          </a:p>
+          <a:p>
+            <a:r>
+              <a:t>1. Calculations, CAD simulation, physical models.</a:t>
+            </a:r>
+          </a:p>
+          <a:p>
+            <a:r>
+              <a:t>2. Each can catch mistakes the others miss.</a:t>
+            </a:r>
+          </a:p>
+          <a:p>
+            <a:r>
+              <a:t>3. Fit, form and function.</a:t>
             </a:r>
           </a:p>
         </p:txBody>
@@ -606,6 +640,146 @@
 </file>
 
 <file path=ppt/notesSlides/notesSlide3.xml><?xml version="1.0" encoding="utf-8"?>
+<p:notes xmlns:a="http://schemas.openxmlformats.org/drawingml/2006/main" xmlns:p="http://schemas.openxmlformats.org/presentationml/2006/main" xmlns:r="http://schemas.openxmlformats.org/officeDocument/2006/relationships">
+  <p:cSld>
+    <p:spTree>
+      <p:nvGrpSpPr>
+        <p:cNvPr id="1" name=""/>
+        <p:cNvGrpSpPr/>
+        <p:nvPr/>
+      </p:nvGrpSpPr>
+      <p:grpSpPr>
+        <a:xfrm>
+          <a:off x="0" y="0"/>
+          <a:ext cx="0" cy="0"/>
+          <a:chOff x="0" y="0"/>
+          <a:chExt cx="0" cy="0"/>
+        </a:xfrm>
+      </p:grpSpPr>
+      <p:sp>
+        <p:nvSpPr>
+          <p:cNvPr id="2" name="Slide Image Placeholder 1"/>
+          <p:cNvSpPr>
+            <a:spLocks noGrp="1"/>
+          </p:cNvSpPr>
+          <p:nvPr>
+            <p:ph type="sldImg" idx="2"/>
+          </p:nvPr>
+        </p:nvSpPr>
+        <p:spPr/>
+      </p:sp>
+      <p:sp>
+        <p:nvSpPr>
+          <p:cNvPr id="3" name="Notes Placeholder 2"/>
+          <p:cNvSpPr>
+            <a:spLocks noGrp="1"/>
+          </p:cNvSpPr>
+          <p:nvPr>
+            <p:ph type="body" idx="3" sz="quarter"/>
+          </p:nvPr>
+        </p:nvSpPr>
+        <p:spPr/>
+        <p:txBody>
+          <a:bodyPr/>
+          <a:lstStyle/>
+          <a:p>
+            <a:r>
+              <a:t>Give students a few minutes to answer on mini whiteboards or paper, then reveal the answers on the next slide.</a:t>
+            </a:r>
+          </a:p>
+        </p:txBody>
+      </p:sp>
+      <p:sp>
+        <p:nvSpPr>
+          <p:cNvPr id="4" name="Slide Number Placeholder 3"/>
+          <p:cNvSpPr>
+            <a:spLocks noGrp="1"/>
+          </p:cNvSpPr>
+          <p:nvPr>
+            <p:ph type="sldNum" idx="5" sz="quarter"/>
+          </p:nvPr>
+        </p:nvSpPr>
+        <p:spPr/>
+      </p:sp>
+    </p:spTree>
+  </p:cSld>
+  <p:clrMapOvr>
+    <a:masterClrMapping/>
+  </p:clrMapOvr>
+</p:notes>
+</file>
+
+<file path=ppt/notesSlides/notesSlide4.xml><?xml version="1.0" encoding="utf-8"?>
+<p:notes xmlns:a="http://schemas.openxmlformats.org/drawingml/2006/main" xmlns:p="http://schemas.openxmlformats.org/presentationml/2006/main" xmlns:r="http://schemas.openxmlformats.org/officeDocument/2006/relationships">
+  <p:cSld>
+    <p:spTree>
+      <p:nvGrpSpPr>
+        <p:cNvPr id="1" name=""/>
+        <p:cNvGrpSpPr/>
+        <p:nvPr/>
+      </p:nvGrpSpPr>
+      <p:grpSpPr>
+        <a:xfrm>
+          <a:off x="0" y="0"/>
+          <a:ext cx="0" cy="0"/>
+          <a:chOff x="0" y="0"/>
+          <a:chExt cx="0" cy="0"/>
+        </a:xfrm>
+      </p:grpSpPr>
+      <p:sp>
+        <p:nvSpPr>
+          <p:cNvPr id="2" name="Slide Image Placeholder 1"/>
+          <p:cNvSpPr>
+            <a:spLocks noGrp="1"/>
+          </p:cNvSpPr>
+          <p:nvPr>
+            <p:ph type="sldImg" idx="2"/>
+          </p:nvPr>
+        </p:nvSpPr>
+        <p:spPr/>
+      </p:sp>
+      <p:sp>
+        <p:nvSpPr>
+          <p:cNvPr id="3" name="Notes Placeholder 2"/>
+          <p:cNvSpPr>
+            <a:spLocks noGrp="1"/>
+          </p:cNvSpPr>
+          <p:nvPr>
+            <p:ph type="body" idx="3" sz="quarter"/>
+          </p:nvPr>
+        </p:nvSpPr>
+        <p:spPr/>
+        <p:txBody>
+          <a:bodyPr/>
+          <a:lstStyle/>
+          <a:p>
+            <a:r>
+              <a:t>Talk through any answers the class found difficult.</a:t>
+            </a:r>
+          </a:p>
+        </p:txBody>
+      </p:sp>
+      <p:sp>
+        <p:nvSpPr>
+          <p:cNvPr id="4" name="Slide Number Placeholder 3"/>
+          <p:cNvSpPr>
+            <a:spLocks noGrp="1"/>
+          </p:cNvSpPr>
+          <p:nvPr>
+            <p:ph type="sldNum" idx="5" sz="quarter"/>
+          </p:nvPr>
+        </p:nvSpPr>
+        <p:spPr/>
+      </p:sp>
+    </p:spTree>
+  </p:cSld>
+  <p:clrMapOvr>
+    <a:masterClrMapping/>
+  </p:clrMapOvr>
+</p:notes>
+</file>
+
+<file path=ppt/notesSlides/notesSlide5.xml><?xml version="1.0" encoding="utf-8"?>
 <p:notes xmlns:a="http://schemas.openxmlformats.org/drawingml/2006/main" xmlns:p="http://schemas.openxmlformats.org/presentationml/2006/main" xmlns:r="http://schemas.openxmlformats.org/officeDocument/2006/relationships">
   <p:cSld>
     <p:spTree>
@@ -3975,6 +4149,2172 @@
 </p:sld>
 </file>
 
+<file path=ppt/slides/slide10.xml><?xml version="1.0" encoding="utf-8"?>
+<p:sld xmlns:a="http://schemas.openxmlformats.org/drawingml/2006/main" xmlns:p="http://schemas.openxmlformats.org/presentationml/2006/main" xmlns:r="http://schemas.openxmlformats.org/officeDocument/2006/relationships">
+  <p:cSld>
+    <p:bg>
+      <p:bgPr>
+        <a:solidFill>
+          <a:srgbClr val="FFFFFF"/>
+        </a:solidFill>
+        <a:effectLst/>
+      </p:bgPr>
+    </p:bg>
+    <p:spTree>
+      <p:nvGrpSpPr>
+        <p:cNvPr id="1" name=""/>
+        <p:cNvGrpSpPr/>
+        <p:nvPr/>
+      </p:nvGrpSpPr>
+      <p:grpSpPr/>
+      <p:sp>
+        <p:nvSpPr>
+          <p:cNvPr id="2" name="TextBox 1"/>
+          <p:cNvSpPr txBox="1"/>
+          <p:nvPr/>
+        </p:nvSpPr>
+        <p:spPr>
+          <a:xfrm>
+            <a:off x="548640" y="320040"/>
+            <a:ext cx="11094415" cy="274320"/>
+          </a:xfrm>
+          <a:prstGeom prst="rect">
+            <a:avLst/>
+          </a:prstGeom>
+          <a:noFill/>
+        </p:spPr>
+        <p:txBody>
+          <a:bodyPr wrap="square" anchor="t" lIns="0" rIns="0" tIns="0" bIns="0"/>
+          <a:lstStyle/>
+          <a:p>
+            <a:pPr algn="l"/>
+            <a:r>
+              <a:rPr sz="1100" b="1" i="0">
+                <a:solidFill>
+                  <a:srgbClr val="54595D"/>
+                </a:solidFill>
+                <a:latin typeface="Calibri"/>
+              </a:rPr>
+              <a:t>MECHANICAL ENGINEERING  ·  Mechanical: Performance Outcome 2</a:t>
+            </a:r>
+          </a:p>
+        </p:txBody>
+      </p:sp>
+      <p:sp>
+        <p:nvSpPr>
+          <p:cNvPr id="3" name="TextBox 2"/>
+          <p:cNvSpPr txBox="1"/>
+          <p:nvPr/>
+        </p:nvSpPr>
+        <p:spPr>
+          <a:xfrm>
+            <a:off x="548640" y="566928"/>
+            <a:ext cx="11094415" cy="822960"/>
+          </a:xfrm>
+          <a:prstGeom prst="rect">
+            <a:avLst/>
+          </a:prstGeom>
+          <a:noFill/>
+        </p:spPr>
+        <p:txBody>
+          <a:bodyPr wrap="square" anchor="ctr" lIns="0" rIns="0" tIns="0" bIns="0"/>
+          <a:lstStyle/>
+          <a:p>
+            <a:pPr algn="l"/>
+            <a:r>
+              <a:rPr sz="3200" b="1" i="0">
+                <a:solidFill>
+                  <a:srgbClr val="03306E"/>
+                </a:solidFill>
+                <a:latin typeface="Cambria"/>
+              </a:rPr>
+              <a:t>Check your understanding</a:t>
+            </a:r>
+          </a:p>
+        </p:txBody>
+      </p:sp>
+      <p:sp>
+        <p:nvSpPr>
+          <p:cNvPr id="4" name="TextBox 3"/>
+          <p:cNvSpPr txBox="1"/>
+          <p:nvPr/>
+        </p:nvSpPr>
+        <p:spPr>
+          <a:xfrm>
+            <a:off x="548640" y="6446520"/>
+            <a:ext cx="8229600" cy="274320"/>
+          </a:xfrm>
+          <a:prstGeom prst="rect">
+            <a:avLst/>
+          </a:prstGeom>
+          <a:noFill/>
+        </p:spPr>
+        <p:txBody>
+          <a:bodyPr wrap="square" anchor="t" lIns="0" rIns="0" tIns="0" bIns="0"/>
+          <a:lstStyle/>
+          <a:p>
+            <a:pPr algn="l"/>
+            <a:r>
+              <a:rPr sz="1000" b="0" i="0">
+                <a:solidFill>
+                  <a:srgbClr val="54595D"/>
+                </a:solidFill>
+                <a:latin typeface="Calibri"/>
+              </a:rPr>
+              <a:t>Design and Development for Engineering and Manufacturing T Level  ·  Analysing Requirements and Design Information</a:t>
+            </a:r>
+          </a:p>
+        </p:txBody>
+      </p:sp>
+      <p:sp>
+        <p:nvSpPr>
+          <p:cNvPr id="5" name="TextBox 4"/>
+          <p:cNvSpPr txBox="1"/>
+          <p:nvPr/>
+        </p:nvSpPr>
+        <p:spPr>
+          <a:xfrm>
+            <a:off x="10728655" y="6446520"/>
+            <a:ext cx="914400" cy="274320"/>
+          </a:xfrm>
+          <a:prstGeom prst="rect">
+            <a:avLst/>
+          </a:prstGeom>
+          <a:noFill/>
+        </p:spPr>
+        <p:txBody>
+          <a:bodyPr wrap="square" anchor="t" lIns="0" rIns="0" tIns="0" bIns="0"/>
+          <a:lstStyle/>
+          <a:p>
+            <a:pPr algn="r"/>
+            <a:r>
+              <a:rPr sz="1000" b="0" i="0">
+                <a:solidFill>
+                  <a:srgbClr val="54595D"/>
+                </a:solidFill>
+                <a:latin typeface="Calibri"/>
+              </a:rPr>
+              <a:t>10</a:t>
+            </a:r>
+          </a:p>
+        </p:txBody>
+      </p:sp>
+      <p:sp>
+        <p:nvSpPr>
+          <p:cNvPr id="6" name="Oval 5"/>
+          <p:cNvSpPr/>
+          <p:nvPr/>
+        </p:nvSpPr>
+        <p:spPr>
+          <a:xfrm>
+            <a:off x="548640" y="1618488"/>
+            <a:ext cx="411480" cy="411480"/>
+          </a:xfrm>
+          <a:prstGeom prst="ellipse">
+            <a:avLst/>
+          </a:prstGeom>
+          <a:solidFill>
+            <a:srgbClr val="E0463A"/>
+          </a:solidFill>
+          <a:ln>
+            <a:noFill/>
+          </a:ln>
+          <a:effectLst/>
+        </p:spPr>
+        <p:style>
+          <a:lnRef idx="1">
+            <a:schemeClr val="accent1"/>
+          </a:lnRef>
+          <a:fillRef idx="3">
+            <a:schemeClr val="accent1"/>
+          </a:fillRef>
+          <a:effectRef idx="2">
+            <a:schemeClr val="accent1"/>
+          </a:effectRef>
+          <a:fontRef idx="minor">
+            <a:schemeClr val="lt1"/>
+          </a:fontRef>
+        </p:style>
+        <p:txBody>
+          <a:bodyPr rtlCol="0" anchor="ctr" lIns="0" rIns="0" tIns="0" bIns="0"/>
+          <a:lstStyle/>
+          <a:p>
+            <a:pPr algn="ctr"/>
+            <a:r>
+              <a:rPr sz="1400" b="1">
+                <a:solidFill>
+                  <a:srgbClr val="FFFFFF"/>
+                </a:solidFill>
+                <a:latin typeface="Calibri"/>
+              </a:rPr>
+              <a:t>1</a:t>
+            </a:r>
+          </a:p>
+        </p:txBody>
+      </p:sp>
+      <p:sp>
+        <p:nvSpPr>
+          <p:cNvPr id="7" name="TextBox 6"/>
+          <p:cNvSpPr txBox="1"/>
+          <p:nvPr/>
+        </p:nvSpPr>
+        <p:spPr>
+          <a:xfrm>
+            <a:off x="1234440" y="1600200"/>
+            <a:ext cx="10408615" cy="1429512"/>
+          </a:xfrm>
+          <a:prstGeom prst="rect">
+            <a:avLst/>
+          </a:prstGeom>
+          <a:noFill/>
+        </p:spPr>
+        <p:txBody>
+          <a:bodyPr wrap="square" anchor="t" lIns="0" rIns="0" tIns="0" bIns="0"/>
+          <a:lstStyle/>
+          <a:p>
+            <a:pPr algn="l"/>
+            <a:r>
+              <a:rPr sz="2200" b="0" i="0">
+                <a:solidFill>
+                  <a:srgbClr val="202122"/>
+                </a:solidFill>
+                <a:latin typeface="Calibri"/>
+              </a:rPr>
+              <a:t>What is scope creep?</a:t>
+            </a:r>
+          </a:p>
+        </p:txBody>
+      </p:sp>
+      <p:sp>
+        <p:nvSpPr>
+          <p:cNvPr id="8" name="Oval 7"/>
+          <p:cNvSpPr/>
+          <p:nvPr/>
+        </p:nvSpPr>
+        <p:spPr>
+          <a:xfrm>
+            <a:off x="548640" y="3212592"/>
+            <a:ext cx="411480" cy="411480"/>
+          </a:xfrm>
+          <a:prstGeom prst="ellipse">
+            <a:avLst/>
+          </a:prstGeom>
+          <a:solidFill>
+            <a:srgbClr val="E0463A"/>
+          </a:solidFill>
+          <a:ln>
+            <a:noFill/>
+          </a:ln>
+          <a:effectLst/>
+        </p:spPr>
+        <p:style>
+          <a:lnRef idx="1">
+            <a:schemeClr val="accent1"/>
+          </a:lnRef>
+          <a:fillRef idx="3">
+            <a:schemeClr val="accent1"/>
+          </a:fillRef>
+          <a:effectRef idx="2">
+            <a:schemeClr val="accent1"/>
+          </a:effectRef>
+          <a:fontRef idx="minor">
+            <a:schemeClr val="lt1"/>
+          </a:fontRef>
+        </p:style>
+        <p:txBody>
+          <a:bodyPr rtlCol="0" anchor="ctr" lIns="0" rIns="0" tIns="0" bIns="0"/>
+          <a:lstStyle/>
+          <a:p>
+            <a:pPr algn="ctr"/>
+            <a:r>
+              <a:rPr sz="1400" b="1">
+                <a:solidFill>
+                  <a:srgbClr val="FFFFFF"/>
+                </a:solidFill>
+                <a:latin typeface="Calibri"/>
+              </a:rPr>
+              <a:t>2</a:t>
+            </a:r>
+          </a:p>
+        </p:txBody>
+      </p:sp>
+      <p:sp>
+        <p:nvSpPr>
+          <p:cNvPr id="9" name="TextBox 8"/>
+          <p:cNvSpPr txBox="1"/>
+          <p:nvPr/>
+        </p:nvSpPr>
+        <p:spPr>
+          <a:xfrm>
+            <a:off x="1234440" y="3194304"/>
+            <a:ext cx="10408615" cy="1429512"/>
+          </a:xfrm>
+          <a:prstGeom prst="rect">
+            <a:avLst/>
+          </a:prstGeom>
+          <a:noFill/>
+        </p:spPr>
+        <p:txBody>
+          <a:bodyPr wrap="square" anchor="t" lIns="0" rIns="0" tIns="0" bIns="0"/>
+          <a:lstStyle/>
+          <a:p>
+            <a:pPr algn="l"/>
+            <a:r>
+              <a:rPr sz="2200" b="0" i="0">
+                <a:solidFill>
+                  <a:srgbClr val="202122"/>
+                </a:solidFill>
+                <a:latin typeface="Calibri"/>
+              </a:rPr>
+              <a:t>Give two formats of engineering information.</a:t>
+            </a:r>
+          </a:p>
+        </p:txBody>
+      </p:sp>
+      <p:sp>
+        <p:nvSpPr>
+          <p:cNvPr id="10" name="Oval 9"/>
+          <p:cNvSpPr/>
+          <p:nvPr/>
+        </p:nvSpPr>
+        <p:spPr>
+          <a:xfrm>
+            <a:off x="548640" y="4806695"/>
+            <a:ext cx="411480" cy="411480"/>
+          </a:xfrm>
+          <a:prstGeom prst="ellipse">
+            <a:avLst/>
+          </a:prstGeom>
+          <a:solidFill>
+            <a:srgbClr val="E0463A"/>
+          </a:solidFill>
+          <a:ln>
+            <a:noFill/>
+          </a:ln>
+          <a:effectLst/>
+        </p:spPr>
+        <p:style>
+          <a:lnRef idx="1">
+            <a:schemeClr val="accent1"/>
+          </a:lnRef>
+          <a:fillRef idx="3">
+            <a:schemeClr val="accent1"/>
+          </a:fillRef>
+          <a:effectRef idx="2">
+            <a:schemeClr val="accent1"/>
+          </a:effectRef>
+          <a:fontRef idx="minor">
+            <a:schemeClr val="lt1"/>
+          </a:fontRef>
+        </p:style>
+        <p:txBody>
+          <a:bodyPr rtlCol="0" anchor="ctr" lIns="0" rIns="0" tIns="0" bIns="0"/>
+          <a:lstStyle/>
+          <a:p>
+            <a:pPr algn="ctr"/>
+            <a:r>
+              <a:rPr sz="1400" b="1">
+                <a:solidFill>
+                  <a:srgbClr val="FFFFFF"/>
+                </a:solidFill>
+                <a:latin typeface="Calibri"/>
+              </a:rPr>
+              <a:t>3</a:t>
+            </a:r>
+          </a:p>
+        </p:txBody>
+      </p:sp>
+      <p:sp>
+        <p:nvSpPr>
+          <p:cNvPr id="11" name="TextBox 10"/>
+          <p:cNvSpPr txBox="1"/>
+          <p:nvPr/>
+        </p:nvSpPr>
+        <p:spPr>
+          <a:xfrm>
+            <a:off x="1234440" y="4788408"/>
+            <a:ext cx="10408615" cy="1429512"/>
+          </a:xfrm>
+          <a:prstGeom prst="rect">
+            <a:avLst/>
+          </a:prstGeom>
+          <a:noFill/>
+        </p:spPr>
+        <p:txBody>
+          <a:bodyPr wrap="square" anchor="t" lIns="0" rIns="0" tIns="0" bIns="0"/>
+          <a:lstStyle/>
+          <a:p>
+            <a:pPr algn="l"/>
+            <a:r>
+              <a:rPr sz="2200" b="0" i="0">
+                <a:solidFill>
+                  <a:srgbClr val="202122"/>
+                </a:solidFill>
+                <a:latin typeface="Calibri"/>
+              </a:rPr>
+              <a:t>Why verify a design with calculations as well as CAD?</a:t>
+            </a:r>
+          </a:p>
+        </p:txBody>
+      </p:sp>
+    </p:spTree>
+  </p:cSld>
+  <p:clrMapOvr>
+    <a:masterClrMapping/>
+  </p:clrMapOvr>
+</p:sld>
+</file>
+
+<file path=ppt/slides/slide11.xml><?xml version="1.0" encoding="utf-8"?>
+<p:sld xmlns:a="http://schemas.openxmlformats.org/drawingml/2006/main" xmlns:p="http://schemas.openxmlformats.org/presentationml/2006/main" xmlns:r="http://schemas.openxmlformats.org/officeDocument/2006/relationships">
+  <p:cSld>
+    <p:bg>
+      <p:bgPr>
+        <a:solidFill>
+          <a:srgbClr val="FFFFFF"/>
+        </a:solidFill>
+        <a:effectLst/>
+      </p:bgPr>
+    </p:bg>
+    <p:spTree>
+      <p:nvGrpSpPr>
+        <p:cNvPr id="1" name=""/>
+        <p:cNvGrpSpPr/>
+        <p:nvPr/>
+      </p:nvGrpSpPr>
+      <p:grpSpPr/>
+      <p:sp>
+        <p:nvSpPr>
+          <p:cNvPr id="2" name="TextBox 1"/>
+          <p:cNvSpPr txBox="1"/>
+          <p:nvPr/>
+        </p:nvSpPr>
+        <p:spPr>
+          <a:xfrm>
+            <a:off x="548640" y="320040"/>
+            <a:ext cx="11094415" cy="274320"/>
+          </a:xfrm>
+          <a:prstGeom prst="rect">
+            <a:avLst/>
+          </a:prstGeom>
+          <a:noFill/>
+        </p:spPr>
+        <p:txBody>
+          <a:bodyPr wrap="square" anchor="t" lIns="0" rIns="0" tIns="0" bIns="0"/>
+          <a:lstStyle/>
+          <a:p>
+            <a:pPr algn="l"/>
+            <a:r>
+              <a:rPr sz="1100" b="1" i="0">
+                <a:solidFill>
+                  <a:srgbClr val="54595D"/>
+                </a:solidFill>
+                <a:latin typeface="Calibri"/>
+              </a:rPr>
+              <a:t>MECHANICAL ENGINEERING  ·  Mechanical: Performance Outcome 2</a:t>
+            </a:r>
+          </a:p>
+        </p:txBody>
+      </p:sp>
+      <p:sp>
+        <p:nvSpPr>
+          <p:cNvPr id="3" name="TextBox 2"/>
+          <p:cNvSpPr txBox="1"/>
+          <p:nvPr/>
+        </p:nvSpPr>
+        <p:spPr>
+          <a:xfrm>
+            <a:off x="548640" y="566928"/>
+            <a:ext cx="11094415" cy="822960"/>
+          </a:xfrm>
+          <a:prstGeom prst="rect">
+            <a:avLst/>
+          </a:prstGeom>
+          <a:noFill/>
+        </p:spPr>
+        <p:txBody>
+          <a:bodyPr wrap="square" anchor="ctr" lIns="0" rIns="0" tIns="0" bIns="0"/>
+          <a:lstStyle/>
+          <a:p>
+            <a:pPr algn="l"/>
+            <a:r>
+              <a:rPr sz="3200" b="1" i="0">
+                <a:solidFill>
+                  <a:srgbClr val="03306E"/>
+                </a:solidFill>
+                <a:latin typeface="Cambria"/>
+              </a:rPr>
+              <a:t>Answers</a:t>
+            </a:r>
+          </a:p>
+        </p:txBody>
+      </p:sp>
+      <p:sp>
+        <p:nvSpPr>
+          <p:cNvPr id="4" name="TextBox 3"/>
+          <p:cNvSpPr txBox="1"/>
+          <p:nvPr/>
+        </p:nvSpPr>
+        <p:spPr>
+          <a:xfrm>
+            <a:off x="548640" y="6446520"/>
+            <a:ext cx="8229600" cy="274320"/>
+          </a:xfrm>
+          <a:prstGeom prst="rect">
+            <a:avLst/>
+          </a:prstGeom>
+          <a:noFill/>
+        </p:spPr>
+        <p:txBody>
+          <a:bodyPr wrap="square" anchor="t" lIns="0" rIns="0" tIns="0" bIns="0"/>
+          <a:lstStyle/>
+          <a:p>
+            <a:pPr algn="l"/>
+            <a:r>
+              <a:rPr sz="1000" b="0" i="0">
+                <a:solidFill>
+                  <a:srgbClr val="54595D"/>
+                </a:solidFill>
+                <a:latin typeface="Calibri"/>
+              </a:rPr>
+              <a:t>Design and Development for Engineering and Manufacturing T Level  ·  Analysing Requirements and Design Information</a:t>
+            </a:r>
+          </a:p>
+        </p:txBody>
+      </p:sp>
+      <p:sp>
+        <p:nvSpPr>
+          <p:cNvPr id="5" name="TextBox 4"/>
+          <p:cNvSpPr txBox="1"/>
+          <p:nvPr/>
+        </p:nvSpPr>
+        <p:spPr>
+          <a:xfrm>
+            <a:off x="10728655" y="6446520"/>
+            <a:ext cx="914400" cy="274320"/>
+          </a:xfrm>
+          <a:prstGeom prst="rect">
+            <a:avLst/>
+          </a:prstGeom>
+          <a:noFill/>
+        </p:spPr>
+        <p:txBody>
+          <a:bodyPr wrap="square" anchor="t" lIns="0" rIns="0" tIns="0" bIns="0"/>
+          <a:lstStyle/>
+          <a:p>
+            <a:pPr algn="r"/>
+            <a:r>
+              <a:rPr sz="1000" b="0" i="0">
+                <a:solidFill>
+                  <a:srgbClr val="54595D"/>
+                </a:solidFill>
+                <a:latin typeface="Calibri"/>
+              </a:rPr>
+              <a:t>11</a:t>
+            </a:r>
+          </a:p>
+        </p:txBody>
+      </p:sp>
+      <p:sp>
+        <p:nvSpPr>
+          <p:cNvPr id="6" name="Oval 5"/>
+          <p:cNvSpPr/>
+          <p:nvPr/>
+        </p:nvSpPr>
+        <p:spPr>
+          <a:xfrm>
+            <a:off x="548640" y="1618488"/>
+            <a:ext cx="411480" cy="411480"/>
+          </a:xfrm>
+          <a:prstGeom prst="ellipse">
+            <a:avLst/>
+          </a:prstGeom>
+          <a:solidFill>
+            <a:srgbClr val="E0463A"/>
+          </a:solidFill>
+          <a:ln>
+            <a:noFill/>
+          </a:ln>
+          <a:effectLst/>
+        </p:spPr>
+        <p:style>
+          <a:lnRef idx="1">
+            <a:schemeClr val="accent1"/>
+          </a:lnRef>
+          <a:fillRef idx="3">
+            <a:schemeClr val="accent1"/>
+          </a:fillRef>
+          <a:effectRef idx="2">
+            <a:schemeClr val="accent1"/>
+          </a:effectRef>
+          <a:fontRef idx="minor">
+            <a:schemeClr val="lt1"/>
+          </a:fontRef>
+        </p:style>
+        <p:txBody>
+          <a:bodyPr rtlCol="0" anchor="ctr" lIns="0" rIns="0" tIns="0" bIns="0"/>
+          <a:lstStyle/>
+          <a:p>
+            <a:pPr algn="ctr"/>
+            <a:r>
+              <a:rPr sz="1400" b="1">
+                <a:solidFill>
+                  <a:srgbClr val="FFFFFF"/>
+                </a:solidFill>
+                <a:latin typeface="Calibri"/>
+              </a:rPr>
+              <a:t>1</a:t>
+            </a:r>
+          </a:p>
+        </p:txBody>
+      </p:sp>
+      <p:sp>
+        <p:nvSpPr>
+          <p:cNvPr id="7" name="TextBox 6"/>
+          <p:cNvSpPr txBox="1"/>
+          <p:nvPr/>
+        </p:nvSpPr>
+        <p:spPr>
+          <a:xfrm>
+            <a:off x="1234440" y="1600200"/>
+            <a:ext cx="10408615" cy="1429512"/>
+          </a:xfrm>
+          <a:prstGeom prst="rect">
+            <a:avLst/>
+          </a:prstGeom>
+          <a:noFill/>
+        </p:spPr>
+        <p:txBody>
+          <a:bodyPr wrap="square" anchor="t" lIns="0" rIns="0" tIns="0" bIns="0"/>
+          <a:lstStyle/>
+          <a:p>
+            <a:pPr algn="l"/>
+            <a:r>
+              <a:rPr sz="1800" b="0" i="0">
+                <a:solidFill>
+                  <a:srgbClr val="54595D"/>
+                </a:solidFill>
+                <a:latin typeface="Calibri"/>
+              </a:rPr>
+              <a:t>What is scope creep?</a:t>
+            </a:r>
+          </a:p>
+          <a:p>
+            <a:r>
+              <a:rPr sz="1800" b="1">
+                <a:solidFill>
+                  <a:srgbClr val="03306E"/>
+                </a:solidFill>
+                <a:latin typeface="Calibri"/>
+              </a:rPr>
+              <a:t>Uncontrolled growth in project requirements.</a:t>
+            </a:r>
+          </a:p>
+        </p:txBody>
+      </p:sp>
+      <p:sp>
+        <p:nvSpPr>
+          <p:cNvPr id="8" name="Oval 7"/>
+          <p:cNvSpPr/>
+          <p:nvPr/>
+        </p:nvSpPr>
+        <p:spPr>
+          <a:xfrm>
+            <a:off x="548640" y="3212592"/>
+            <a:ext cx="411480" cy="411480"/>
+          </a:xfrm>
+          <a:prstGeom prst="ellipse">
+            <a:avLst/>
+          </a:prstGeom>
+          <a:solidFill>
+            <a:srgbClr val="E0463A"/>
+          </a:solidFill>
+          <a:ln>
+            <a:noFill/>
+          </a:ln>
+          <a:effectLst/>
+        </p:spPr>
+        <p:style>
+          <a:lnRef idx="1">
+            <a:schemeClr val="accent1"/>
+          </a:lnRef>
+          <a:fillRef idx="3">
+            <a:schemeClr val="accent1"/>
+          </a:fillRef>
+          <a:effectRef idx="2">
+            <a:schemeClr val="accent1"/>
+          </a:effectRef>
+          <a:fontRef idx="minor">
+            <a:schemeClr val="lt1"/>
+          </a:fontRef>
+        </p:style>
+        <p:txBody>
+          <a:bodyPr rtlCol="0" anchor="ctr" lIns="0" rIns="0" tIns="0" bIns="0"/>
+          <a:lstStyle/>
+          <a:p>
+            <a:pPr algn="ctr"/>
+            <a:r>
+              <a:rPr sz="1400" b="1">
+                <a:solidFill>
+                  <a:srgbClr val="FFFFFF"/>
+                </a:solidFill>
+                <a:latin typeface="Calibri"/>
+              </a:rPr>
+              <a:t>2</a:t>
+            </a:r>
+          </a:p>
+        </p:txBody>
+      </p:sp>
+      <p:sp>
+        <p:nvSpPr>
+          <p:cNvPr id="9" name="TextBox 8"/>
+          <p:cNvSpPr txBox="1"/>
+          <p:nvPr/>
+        </p:nvSpPr>
+        <p:spPr>
+          <a:xfrm>
+            <a:off x="1234440" y="3194304"/>
+            <a:ext cx="10408615" cy="1429512"/>
+          </a:xfrm>
+          <a:prstGeom prst="rect">
+            <a:avLst/>
+          </a:prstGeom>
+          <a:noFill/>
+        </p:spPr>
+        <p:txBody>
+          <a:bodyPr wrap="square" anchor="t" lIns="0" rIns="0" tIns="0" bIns="0"/>
+          <a:lstStyle/>
+          <a:p>
+            <a:pPr algn="l"/>
+            <a:r>
+              <a:rPr sz="1800" b="0" i="0">
+                <a:solidFill>
+                  <a:srgbClr val="54595D"/>
+                </a:solidFill>
+                <a:latin typeface="Calibri"/>
+              </a:rPr>
+              <a:t>Give two formats of engineering information.</a:t>
+            </a:r>
+          </a:p>
+          <a:p>
+            <a:r>
+              <a:rPr sz="1800" b="1">
+                <a:solidFill>
+                  <a:srgbClr val="03306E"/>
+                </a:solidFill>
+                <a:latin typeface="Calibri"/>
+              </a:rPr>
+              <a:t>Any two, e.g. specifications, CAD models, drawings, SOPs.</a:t>
+            </a:r>
+          </a:p>
+        </p:txBody>
+      </p:sp>
+      <p:sp>
+        <p:nvSpPr>
+          <p:cNvPr id="10" name="Oval 9"/>
+          <p:cNvSpPr/>
+          <p:nvPr/>
+        </p:nvSpPr>
+        <p:spPr>
+          <a:xfrm>
+            <a:off x="548640" y="4806695"/>
+            <a:ext cx="411480" cy="411480"/>
+          </a:xfrm>
+          <a:prstGeom prst="ellipse">
+            <a:avLst/>
+          </a:prstGeom>
+          <a:solidFill>
+            <a:srgbClr val="E0463A"/>
+          </a:solidFill>
+          <a:ln>
+            <a:noFill/>
+          </a:ln>
+          <a:effectLst/>
+        </p:spPr>
+        <p:style>
+          <a:lnRef idx="1">
+            <a:schemeClr val="accent1"/>
+          </a:lnRef>
+          <a:fillRef idx="3">
+            <a:schemeClr val="accent1"/>
+          </a:fillRef>
+          <a:effectRef idx="2">
+            <a:schemeClr val="accent1"/>
+          </a:effectRef>
+          <a:fontRef idx="minor">
+            <a:schemeClr val="lt1"/>
+          </a:fontRef>
+        </p:style>
+        <p:txBody>
+          <a:bodyPr rtlCol="0" anchor="ctr" lIns="0" rIns="0" tIns="0" bIns="0"/>
+          <a:lstStyle/>
+          <a:p>
+            <a:pPr algn="ctr"/>
+            <a:r>
+              <a:rPr sz="1400" b="1">
+                <a:solidFill>
+                  <a:srgbClr val="FFFFFF"/>
+                </a:solidFill>
+                <a:latin typeface="Calibri"/>
+              </a:rPr>
+              <a:t>3</a:t>
+            </a:r>
+          </a:p>
+        </p:txBody>
+      </p:sp>
+      <p:sp>
+        <p:nvSpPr>
+          <p:cNvPr id="11" name="TextBox 10"/>
+          <p:cNvSpPr txBox="1"/>
+          <p:nvPr/>
+        </p:nvSpPr>
+        <p:spPr>
+          <a:xfrm>
+            <a:off x="1234440" y="4788408"/>
+            <a:ext cx="10408615" cy="1429512"/>
+          </a:xfrm>
+          <a:prstGeom prst="rect">
+            <a:avLst/>
+          </a:prstGeom>
+          <a:noFill/>
+        </p:spPr>
+        <p:txBody>
+          <a:bodyPr wrap="square" anchor="t" lIns="0" rIns="0" tIns="0" bIns="0"/>
+          <a:lstStyle/>
+          <a:p>
+            <a:pPr algn="l"/>
+            <a:r>
+              <a:rPr sz="1800" b="0" i="0">
+                <a:solidFill>
+                  <a:srgbClr val="54595D"/>
+                </a:solidFill>
+                <a:latin typeface="Calibri"/>
+              </a:rPr>
+              <a:t>Why verify a design with calculations as well as CAD?</a:t>
+            </a:r>
+          </a:p>
+          <a:p>
+            <a:r>
+              <a:rPr sz="1800" b="1">
+                <a:solidFill>
+                  <a:srgbClr val="03306E"/>
+                </a:solidFill>
+                <a:latin typeface="Calibri"/>
+              </a:rPr>
+              <a:t>To check the simulation and confirm results independently.</a:t>
+            </a:r>
+          </a:p>
+        </p:txBody>
+      </p:sp>
+    </p:spTree>
+  </p:cSld>
+  <p:clrMapOvr>
+    <a:masterClrMapping/>
+  </p:clrMapOvr>
+</p:sld>
+</file>
+
+<file path=ppt/slides/slide12.xml><?xml version="1.0" encoding="utf-8"?>
+<p:sld xmlns:a="http://schemas.openxmlformats.org/drawingml/2006/main" xmlns:p="http://schemas.openxmlformats.org/presentationml/2006/main" xmlns:r="http://schemas.openxmlformats.org/officeDocument/2006/relationships">
+  <p:cSld>
+    <p:bg>
+      <p:bgPr>
+        <a:solidFill>
+          <a:srgbClr val="FFFFFF"/>
+        </a:solidFill>
+        <a:effectLst/>
+      </p:bgPr>
+    </p:bg>
+    <p:spTree>
+      <p:nvGrpSpPr>
+        <p:cNvPr id="1" name=""/>
+        <p:cNvGrpSpPr/>
+        <p:nvPr/>
+      </p:nvGrpSpPr>
+      <p:grpSpPr/>
+      <p:sp>
+        <p:nvSpPr>
+          <p:cNvPr id="2" name="TextBox 1"/>
+          <p:cNvSpPr txBox="1"/>
+          <p:nvPr/>
+        </p:nvSpPr>
+        <p:spPr>
+          <a:xfrm>
+            <a:off x="548640" y="320040"/>
+            <a:ext cx="11094415" cy="274320"/>
+          </a:xfrm>
+          <a:prstGeom prst="rect">
+            <a:avLst/>
+          </a:prstGeom>
+          <a:noFill/>
+        </p:spPr>
+        <p:txBody>
+          <a:bodyPr wrap="square" anchor="t" lIns="0" rIns="0" tIns="0" bIns="0"/>
+          <a:lstStyle/>
+          <a:p>
+            <a:pPr algn="l"/>
+            <a:r>
+              <a:rPr sz="1100" b="1" i="0">
+                <a:solidFill>
+                  <a:srgbClr val="54595D"/>
+                </a:solidFill>
+                <a:latin typeface="Calibri"/>
+              </a:rPr>
+              <a:t>MECHANICAL ENGINEERING  ·  Mechanical: Performance Outcome 2</a:t>
+            </a:r>
+          </a:p>
+        </p:txBody>
+      </p:sp>
+      <p:sp>
+        <p:nvSpPr>
+          <p:cNvPr id="3" name="TextBox 2"/>
+          <p:cNvSpPr txBox="1"/>
+          <p:nvPr/>
+        </p:nvSpPr>
+        <p:spPr>
+          <a:xfrm>
+            <a:off x="548640" y="566928"/>
+            <a:ext cx="11094415" cy="822960"/>
+          </a:xfrm>
+          <a:prstGeom prst="rect">
+            <a:avLst/>
+          </a:prstGeom>
+          <a:noFill/>
+        </p:spPr>
+        <p:txBody>
+          <a:bodyPr wrap="square" anchor="ctr" lIns="0" rIns="0" tIns="0" bIns="0"/>
+          <a:lstStyle/>
+          <a:p>
+            <a:pPr algn="l"/>
+            <a:r>
+              <a:rPr sz="3200" b="1" i="0">
+                <a:solidFill>
+                  <a:srgbClr val="03306E"/>
+                </a:solidFill>
+                <a:latin typeface="Cambria"/>
+              </a:rPr>
+              <a:t>Activity: Spot the errors</a:t>
+            </a:r>
+          </a:p>
+        </p:txBody>
+      </p:sp>
+      <p:sp>
+        <p:nvSpPr>
+          <p:cNvPr id="4" name="TextBox 3"/>
+          <p:cNvSpPr txBox="1"/>
+          <p:nvPr/>
+        </p:nvSpPr>
+        <p:spPr>
+          <a:xfrm>
+            <a:off x="548640" y="6446520"/>
+            <a:ext cx="8229600" cy="274320"/>
+          </a:xfrm>
+          <a:prstGeom prst="rect">
+            <a:avLst/>
+          </a:prstGeom>
+          <a:noFill/>
+        </p:spPr>
+        <p:txBody>
+          <a:bodyPr wrap="square" anchor="t" lIns="0" rIns="0" tIns="0" bIns="0"/>
+          <a:lstStyle/>
+          <a:p>
+            <a:pPr algn="l"/>
+            <a:r>
+              <a:rPr sz="1000" b="0" i="0">
+                <a:solidFill>
+                  <a:srgbClr val="54595D"/>
+                </a:solidFill>
+                <a:latin typeface="Calibri"/>
+              </a:rPr>
+              <a:t>Design and Development for Engineering and Manufacturing T Level  ·  Analysing Requirements and Design Information</a:t>
+            </a:r>
+          </a:p>
+        </p:txBody>
+      </p:sp>
+      <p:sp>
+        <p:nvSpPr>
+          <p:cNvPr id="5" name="TextBox 4"/>
+          <p:cNvSpPr txBox="1"/>
+          <p:nvPr/>
+        </p:nvSpPr>
+        <p:spPr>
+          <a:xfrm>
+            <a:off x="10728655" y="6446520"/>
+            <a:ext cx="914400" cy="274320"/>
+          </a:xfrm>
+          <a:prstGeom prst="rect">
+            <a:avLst/>
+          </a:prstGeom>
+          <a:noFill/>
+        </p:spPr>
+        <p:txBody>
+          <a:bodyPr wrap="square" anchor="t" lIns="0" rIns="0" tIns="0" bIns="0"/>
+          <a:lstStyle/>
+          <a:p>
+            <a:pPr algn="r"/>
+            <a:r>
+              <a:rPr sz="1000" b="0" i="0">
+                <a:solidFill>
+                  <a:srgbClr val="54595D"/>
+                </a:solidFill>
+                <a:latin typeface="Calibri"/>
+              </a:rPr>
+              <a:t>12</a:t>
+            </a:r>
+          </a:p>
+        </p:txBody>
+      </p:sp>
+      <p:sp>
+        <p:nvSpPr>
+          <p:cNvPr id="6" name="Rounded Rectangle 5"/>
+          <p:cNvSpPr/>
+          <p:nvPr/>
+        </p:nvSpPr>
+        <p:spPr>
+          <a:xfrm>
+            <a:off x="548640" y="1508760"/>
+            <a:ext cx="2011680" cy="457200"/>
+          </a:xfrm>
+          <a:prstGeom prst="roundRect">
+            <a:avLst>
+              <a:gd name="adj" fmla="val 50000"/>
+            </a:avLst>
+          </a:prstGeom>
+          <a:solidFill>
+            <a:srgbClr val="E0463A"/>
+          </a:solidFill>
+          <a:ln>
+            <a:noFill/>
+          </a:ln>
+          <a:effectLst/>
+        </p:spPr>
+        <p:style>
+          <a:lnRef idx="1">
+            <a:schemeClr val="accent1"/>
+          </a:lnRef>
+          <a:fillRef idx="3">
+            <a:schemeClr val="accent1"/>
+          </a:fillRef>
+          <a:effectRef idx="2">
+            <a:schemeClr val="accent1"/>
+          </a:effectRef>
+          <a:fontRef idx="minor">
+            <a:schemeClr val="lt1"/>
+          </a:fontRef>
+        </p:style>
+        <p:txBody>
+          <a:bodyPr rtlCol="0" anchor="ctr"/>
+          <a:lstStyle/>
+          <a:p/>
+        </p:txBody>
+      </p:sp>
+      <p:sp>
+        <p:nvSpPr>
+          <p:cNvPr id="7" name="TextBox 6"/>
+          <p:cNvSpPr txBox="1"/>
+          <p:nvPr/>
+        </p:nvSpPr>
+        <p:spPr>
+          <a:xfrm>
+            <a:off x="548640" y="1508760"/>
+            <a:ext cx="2011680" cy="457200"/>
+          </a:xfrm>
+          <a:prstGeom prst="rect">
+            <a:avLst/>
+          </a:prstGeom>
+          <a:noFill/>
+        </p:spPr>
+        <p:txBody>
+          <a:bodyPr wrap="square" anchor="ctr" lIns="0" rIns="0" tIns="0" bIns="0"/>
+          <a:lstStyle/>
+          <a:p>
+            <a:pPr algn="ctr"/>
+            <a:r>
+              <a:rPr sz="1400" b="1" i="0">
+                <a:solidFill>
+                  <a:srgbClr val="FFFFFF"/>
+                </a:solidFill>
+                <a:latin typeface="Calibri"/>
+              </a:rPr>
+              <a:t>25 minutes</a:t>
+            </a:r>
+          </a:p>
+        </p:txBody>
+      </p:sp>
+      <p:sp>
+        <p:nvSpPr>
+          <p:cNvPr id="8" name="TextBox 7"/>
+          <p:cNvSpPr txBox="1"/>
+          <p:nvPr/>
+        </p:nvSpPr>
+        <p:spPr>
+          <a:xfrm>
+            <a:off x="2743200" y="1508760"/>
+            <a:ext cx="4754880" cy="457200"/>
+          </a:xfrm>
+          <a:prstGeom prst="rect">
+            <a:avLst/>
+          </a:prstGeom>
+          <a:noFill/>
+        </p:spPr>
+        <p:txBody>
+          <a:bodyPr wrap="square" anchor="ctr" lIns="0" rIns="0" tIns="0" bIns="0"/>
+          <a:lstStyle/>
+          <a:p>
+            <a:pPr algn="l"/>
+            <a:r>
+              <a:rPr sz="1400" b="0" i="1">
+                <a:solidFill>
+                  <a:srgbClr val="54595D"/>
+                </a:solidFill>
+                <a:latin typeface="Calibri"/>
+              </a:rPr>
+              <a:t>Pairs</a:t>
+            </a:r>
+          </a:p>
+        </p:txBody>
+      </p:sp>
+      <p:sp>
+        <p:nvSpPr>
+          <p:cNvPr id="9" name="Oval 8"/>
+          <p:cNvSpPr/>
+          <p:nvPr/>
+        </p:nvSpPr>
+        <p:spPr>
+          <a:xfrm>
+            <a:off x="548640" y="2482596"/>
+            <a:ext cx="384048" cy="384048"/>
+          </a:xfrm>
+          <a:prstGeom prst="ellipse">
+            <a:avLst/>
+          </a:prstGeom>
+          <a:solidFill>
+            <a:srgbClr val="0645AD"/>
+          </a:solidFill>
+          <a:ln>
+            <a:noFill/>
+          </a:ln>
+          <a:effectLst/>
+        </p:spPr>
+        <p:style>
+          <a:lnRef idx="1">
+            <a:schemeClr val="accent1"/>
+          </a:lnRef>
+          <a:fillRef idx="3">
+            <a:schemeClr val="accent1"/>
+          </a:fillRef>
+          <a:effectRef idx="2">
+            <a:schemeClr val="accent1"/>
+          </a:effectRef>
+          <a:fontRef idx="minor">
+            <a:schemeClr val="lt1"/>
+          </a:fontRef>
+        </p:style>
+        <p:txBody>
+          <a:bodyPr rtlCol="0" anchor="ctr" lIns="0" rIns="0" tIns="0" bIns="0"/>
+          <a:lstStyle/>
+          <a:p>
+            <a:pPr algn="ctr"/>
+            <a:r>
+              <a:rPr sz="1300" b="1">
+                <a:solidFill>
+                  <a:srgbClr val="FFFFFF"/>
+                </a:solidFill>
+                <a:latin typeface="Calibri"/>
+              </a:rPr>
+              <a:t>1</a:t>
+            </a:r>
+          </a:p>
+        </p:txBody>
+      </p:sp>
+      <p:sp>
+        <p:nvSpPr>
+          <p:cNvPr id="10" name="TextBox 9"/>
+          <p:cNvSpPr txBox="1"/>
+          <p:nvPr/>
+        </p:nvSpPr>
+        <p:spPr>
+          <a:xfrm>
+            <a:off x="1143000" y="2240280"/>
+            <a:ext cx="5943600" cy="868680"/>
+          </a:xfrm>
+          <a:prstGeom prst="rect">
+            <a:avLst/>
+          </a:prstGeom>
+          <a:noFill/>
+        </p:spPr>
+        <p:txBody>
+          <a:bodyPr wrap="square" anchor="ctr" lIns="0" rIns="0" tIns="0" bIns="0"/>
+          <a:lstStyle/>
+          <a:p>
+            <a:pPr algn="l"/>
+            <a:r>
+              <a:rPr sz="1700" b="0" i="0">
+                <a:solidFill>
+                  <a:srgbClr val="202122"/>
+                </a:solidFill>
+                <a:latin typeface="Calibri"/>
+              </a:rPr>
+              <a:t>Review the drawing and specification pack from your teacher.</a:t>
+            </a:r>
+          </a:p>
+        </p:txBody>
+      </p:sp>
+      <p:sp>
+        <p:nvSpPr>
+          <p:cNvPr id="11" name="Oval 10"/>
+          <p:cNvSpPr/>
+          <p:nvPr/>
+        </p:nvSpPr>
+        <p:spPr>
+          <a:xfrm>
+            <a:off x="548640" y="3461004"/>
+            <a:ext cx="384048" cy="384048"/>
+          </a:xfrm>
+          <a:prstGeom prst="ellipse">
+            <a:avLst/>
+          </a:prstGeom>
+          <a:solidFill>
+            <a:srgbClr val="0645AD"/>
+          </a:solidFill>
+          <a:ln>
+            <a:noFill/>
+          </a:ln>
+          <a:effectLst/>
+        </p:spPr>
+        <p:style>
+          <a:lnRef idx="1">
+            <a:schemeClr val="accent1"/>
+          </a:lnRef>
+          <a:fillRef idx="3">
+            <a:schemeClr val="accent1"/>
+          </a:fillRef>
+          <a:effectRef idx="2">
+            <a:schemeClr val="accent1"/>
+          </a:effectRef>
+          <a:fontRef idx="minor">
+            <a:schemeClr val="lt1"/>
+          </a:fontRef>
+        </p:style>
+        <p:txBody>
+          <a:bodyPr rtlCol="0" anchor="ctr" lIns="0" rIns="0" tIns="0" bIns="0"/>
+          <a:lstStyle/>
+          <a:p>
+            <a:pPr algn="ctr"/>
+            <a:r>
+              <a:rPr sz="1300" b="1">
+                <a:solidFill>
+                  <a:srgbClr val="FFFFFF"/>
+                </a:solidFill>
+                <a:latin typeface="Calibri"/>
+              </a:rPr>
+              <a:t>2</a:t>
+            </a:r>
+          </a:p>
+        </p:txBody>
+      </p:sp>
+      <p:sp>
+        <p:nvSpPr>
+          <p:cNvPr id="12" name="TextBox 11"/>
+          <p:cNvSpPr txBox="1"/>
+          <p:nvPr/>
+        </p:nvSpPr>
+        <p:spPr>
+          <a:xfrm>
+            <a:off x="1143000" y="3218688"/>
+            <a:ext cx="5943600" cy="868680"/>
+          </a:xfrm>
+          <a:prstGeom prst="rect">
+            <a:avLst/>
+          </a:prstGeom>
+          <a:noFill/>
+        </p:spPr>
+        <p:txBody>
+          <a:bodyPr wrap="square" anchor="ctr" lIns="0" rIns="0" tIns="0" bIns="0"/>
+          <a:lstStyle/>
+          <a:p>
+            <a:pPr algn="l"/>
+            <a:r>
+              <a:rPr sz="1700" b="0" i="0">
+                <a:solidFill>
+                  <a:srgbClr val="202122"/>
+                </a:solidFill>
+                <a:latin typeface="Calibri"/>
+              </a:rPr>
+              <a:t>Find at least four errors or inconsistencies.</a:t>
+            </a:r>
+          </a:p>
+        </p:txBody>
+      </p:sp>
+      <p:sp>
+        <p:nvSpPr>
+          <p:cNvPr id="13" name="Oval 12"/>
+          <p:cNvSpPr/>
+          <p:nvPr/>
+        </p:nvSpPr>
+        <p:spPr>
+          <a:xfrm>
+            <a:off x="548640" y="4439412"/>
+            <a:ext cx="384048" cy="384048"/>
+          </a:xfrm>
+          <a:prstGeom prst="ellipse">
+            <a:avLst/>
+          </a:prstGeom>
+          <a:solidFill>
+            <a:srgbClr val="0645AD"/>
+          </a:solidFill>
+          <a:ln>
+            <a:noFill/>
+          </a:ln>
+          <a:effectLst/>
+        </p:spPr>
+        <p:style>
+          <a:lnRef idx="1">
+            <a:schemeClr val="accent1"/>
+          </a:lnRef>
+          <a:fillRef idx="3">
+            <a:schemeClr val="accent1"/>
+          </a:fillRef>
+          <a:effectRef idx="2">
+            <a:schemeClr val="accent1"/>
+          </a:effectRef>
+          <a:fontRef idx="minor">
+            <a:schemeClr val="lt1"/>
+          </a:fontRef>
+        </p:style>
+        <p:txBody>
+          <a:bodyPr rtlCol="0" anchor="ctr" lIns="0" rIns="0" tIns="0" bIns="0"/>
+          <a:lstStyle/>
+          <a:p>
+            <a:pPr algn="ctr"/>
+            <a:r>
+              <a:rPr sz="1300" b="1">
+                <a:solidFill>
+                  <a:srgbClr val="FFFFFF"/>
+                </a:solidFill>
+                <a:latin typeface="Calibri"/>
+              </a:rPr>
+              <a:t>3</a:t>
+            </a:r>
+          </a:p>
+        </p:txBody>
+      </p:sp>
+      <p:sp>
+        <p:nvSpPr>
+          <p:cNvPr id="14" name="TextBox 13"/>
+          <p:cNvSpPr txBox="1"/>
+          <p:nvPr/>
+        </p:nvSpPr>
+        <p:spPr>
+          <a:xfrm>
+            <a:off x="1143000" y="4197096"/>
+            <a:ext cx="5943600" cy="868680"/>
+          </a:xfrm>
+          <a:prstGeom prst="rect">
+            <a:avLst/>
+          </a:prstGeom>
+          <a:noFill/>
+        </p:spPr>
+        <p:txBody>
+          <a:bodyPr wrap="square" anchor="ctr" lIns="0" rIns="0" tIns="0" bIns="0"/>
+          <a:lstStyle/>
+          <a:p>
+            <a:pPr algn="l"/>
+            <a:r>
+              <a:rPr sz="1700" b="0" i="0">
+                <a:solidFill>
+                  <a:srgbClr val="202122"/>
+                </a:solidFill>
+                <a:latin typeface="Calibri"/>
+              </a:rPr>
+              <a:t>Correct each one.</a:t>
+            </a:r>
+          </a:p>
+        </p:txBody>
+      </p:sp>
+      <p:sp>
+        <p:nvSpPr>
+          <p:cNvPr id="15" name="Oval 14"/>
+          <p:cNvSpPr/>
+          <p:nvPr/>
+        </p:nvSpPr>
+        <p:spPr>
+          <a:xfrm>
+            <a:off x="548640" y="5417820"/>
+            <a:ext cx="384048" cy="384048"/>
+          </a:xfrm>
+          <a:prstGeom prst="ellipse">
+            <a:avLst/>
+          </a:prstGeom>
+          <a:solidFill>
+            <a:srgbClr val="0645AD"/>
+          </a:solidFill>
+          <a:ln>
+            <a:noFill/>
+          </a:ln>
+          <a:effectLst/>
+        </p:spPr>
+        <p:style>
+          <a:lnRef idx="1">
+            <a:schemeClr val="accent1"/>
+          </a:lnRef>
+          <a:fillRef idx="3">
+            <a:schemeClr val="accent1"/>
+          </a:fillRef>
+          <a:effectRef idx="2">
+            <a:schemeClr val="accent1"/>
+          </a:effectRef>
+          <a:fontRef idx="minor">
+            <a:schemeClr val="lt1"/>
+          </a:fontRef>
+        </p:style>
+        <p:txBody>
+          <a:bodyPr rtlCol="0" anchor="ctr" lIns="0" rIns="0" tIns="0" bIns="0"/>
+          <a:lstStyle/>
+          <a:p>
+            <a:pPr algn="ctr"/>
+            <a:r>
+              <a:rPr sz="1300" b="1">
+                <a:solidFill>
+                  <a:srgbClr val="FFFFFF"/>
+                </a:solidFill>
+                <a:latin typeface="Calibri"/>
+              </a:rPr>
+              <a:t>4</a:t>
+            </a:r>
+          </a:p>
+        </p:txBody>
+      </p:sp>
+      <p:sp>
+        <p:nvSpPr>
+          <p:cNvPr id="16" name="TextBox 15"/>
+          <p:cNvSpPr txBox="1"/>
+          <p:nvPr/>
+        </p:nvSpPr>
+        <p:spPr>
+          <a:xfrm>
+            <a:off x="1143000" y="5175504"/>
+            <a:ext cx="5943600" cy="868680"/>
+          </a:xfrm>
+          <a:prstGeom prst="rect">
+            <a:avLst/>
+          </a:prstGeom>
+          <a:noFill/>
+        </p:spPr>
+        <p:txBody>
+          <a:bodyPr wrap="square" anchor="ctr" lIns="0" rIns="0" tIns="0" bIns="0"/>
+          <a:lstStyle/>
+          <a:p>
+            <a:pPr algn="l"/>
+            <a:r>
+              <a:rPr sz="1700" b="0" i="0">
+                <a:solidFill>
+                  <a:srgbClr val="202122"/>
+                </a:solidFill>
+                <a:latin typeface="Calibri"/>
+              </a:rPr>
+              <a:t>Decide which ones need escalating and to whom.</a:t>
+            </a:r>
+          </a:p>
+        </p:txBody>
+      </p:sp>
+      <p:sp>
+        <p:nvSpPr>
+          <p:cNvPr id="17" name="Rounded Rectangle 16"/>
+          <p:cNvSpPr/>
+          <p:nvPr/>
+        </p:nvSpPr>
+        <p:spPr>
+          <a:xfrm>
+            <a:off x="7772400" y="1508760"/>
+            <a:ext cx="3867912" cy="4572000"/>
+          </a:xfrm>
+          <a:prstGeom prst="roundRect">
+            <a:avLst>
+              <a:gd name="adj" fmla="val 8000"/>
+            </a:avLst>
+          </a:prstGeom>
+          <a:solidFill>
+            <a:srgbClr val="EAF3FF"/>
+          </a:solidFill>
+          <a:ln>
+            <a:noFill/>
+          </a:ln>
+          <a:effectLst/>
+        </p:spPr>
+        <p:style>
+          <a:lnRef idx="1">
+            <a:schemeClr val="accent1"/>
+          </a:lnRef>
+          <a:fillRef idx="3">
+            <a:schemeClr val="accent1"/>
+          </a:fillRef>
+          <a:effectRef idx="2">
+            <a:schemeClr val="accent1"/>
+          </a:effectRef>
+          <a:fontRef idx="minor">
+            <a:schemeClr val="lt1"/>
+          </a:fontRef>
+        </p:style>
+        <p:txBody>
+          <a:bodyPr rtlCol="0" anchor="ctr"/>
+          <a:lstStyle/>
+          <a:p/>
+        </p:txBody>
+      </p:sp>
+      <p:sp>
+        <p:nvSpPr>
+          <p:cNvPr id="18" name="TextBox 17"/>
+          <p:cNvSpPr txBox="1"/>
+          <p:nvPr/>
+        </p:nvSpPr>
+        <p:spPr>
+          <a:xfrm>
+            <a:off x="8046720" y="1737360"/>
+            <a:ext cx="3291840" cy="365760"/>
+          </a:xfrm>
+          <a:prstGeom prst="rect">
+            <a:avLst/>
+          </a:prstGeom>
+          <a:noFill/>
+        </p:spPr>
+        <p:txBody>
+          <a:bodyPr wrap="square" anchor="t" lIns="0" rIns="0" tIns="0" bIns="0"/>
+          <a:lstStyle/>
+          <a:p>
+            <a:pPr algn="l"/>
+            <a:r>
+              <a:rPr sz="1300" b="1" i="0">
+                <a:solidFill>
+                  <a:srgbClr val="0645AD"/>
+                </a:solidFill>
+                <a:latin typeface="Calibri"/>
+              </a:rPr>
+              <a:t>SUCCESS CRITERIA</a:t>
+            </a:r>
+          </a:p>
+        </p:txBody>
+      </p:sp>
+      <p:sp>
+        <p:nvSpPr>
+          <p:cNvPr id="19" name="TextBox 18"/>
+          <p:cNvSpPr txBox="1"/>
+          <p:nvPr/>
+        </p:nvSpPr>
+        <p:spPr>
+          <a:xfrm>
+            <a:off x="8046720" y="2240280"/>
+            <a:ext cx="3337560" cy="3657600"/>
+          </a:xfrm>
+          <a:prstGeom prst="rect">
+            <a:avLst/>
+          </a:prstGeom>
+          <a:noFill/>
+        </p:spPr>
+        <p:txBody>
+          <a:bodyPr wrap="square" lIns="0" rIns="0" tIns="0" bIns="0">
+            <a:spAutoFit/>
+          </a:bodyPr>
+          <a:lstStyle/>
+          <a:p>
+            <a:pPr marL="274320" indent="-274320">
+              <a:spcAft>
+                <a:spcPts val="810"/>
+              </a:spcAft>
+              <a:buClr>
+                <a:srgbClr val="0645AD"/>
+              </a:buClr>
+              <a:buFont typeface="Arial"/>
+              <a:buChar char="•"/>
+            </a:pPr>
+            <a:r>
+              <a:rPr sz="1800" b="0">
+                <a:solidFill>
+                  <a:srgbClr val="202122"/>
+                </a:solidFill>
+                <a:latin typeface="Calibri"/>
+              </a:rPr>
+              <a:t>Errors found and corrected</a:t>
+            </a:r>
+          </a:p>
+          <a:p>
+            <a:pPr marL="274320" indent="-274320">
+              <a:spcAft>
+                <a:spcPts val="810"/>
+              </a:spcAft>
+              <a:buClr>
+                <a:srgbClr val="0645AD"/>
+              </a:buClr>
+              <a:buFont typeface="Arial"/>
+              <a:buChar char="•"/>
+            </a:pPr>
+            <a:r>
+              <a:rPr sz="1800" b="0">
+                <a:solidFill>
+                  <a:srgbClr val="202122"/>
+                </a:solidFill>
+                <a:latin typeface="Calibri"/>
+              </a:rPr>
+              <a:t>Escalation decisions justified</a:t>
+            </a:r>
+          </a:p>
+          <a:p>
+            <a:pPr marL="274320" indent="-274320">
+              <a:spcAft>
+                <a:spcPts val="810"/>
+              </a:spcAft>
+              <a:buClr>
+                <a:srgbClr val="0645AD"/>
+              </a:buClr>
+              <a:buFont typeface="Arial"/>
+              <a:buChar char="•"/>
+            </a:pPr>
+            <a:r>
+              <a:rPr sz="1800" b="0">
+                <a:solidFill>
+                  <a:srgbClr val="202122"/>
+                </a:solidFill>
+                <a:latin typeface="Calibri"/>
+              </a:rPr>
+              <a:t>Changes recorded</a:t>
+            </a:r>
+          </a:p>
+        </p:txBody>
+      </p:sp>
+    </p:spTree>
+  </p:cSld>
+  <p:clrMapOvr>
+    <a:masterClrMapping/>
+  </p:clrMapOvr>
+</p:sld>
+</file>
+
+<file path=ppt/slides/slide13.xml><?xml version="1.0" encoding="utf-8"?>
+<p:sld xmlns:a="http://schemas.openxmlformats.org/drawingml/2006/main" xmlns:p="http://schemas.openxmlformats.org/presentationml/2006/main" xmlns:r="http://schemas.openxmlformats.org/officeDocument/2006/relationships">
+  <p:cSld>
+    <p:bg>
+      <p:bgPr>
+        <a:solidFill>
+          <a:srgbClr val="03306E"/>
+        </a:solidFill>
+        <a:effectLst/>
+      </p:bgPr>
+    </p:bg>
+    <p:spTree>
+      <p:nvGrpSpPr>
+        <p:cNvPr id="1" name=""/>
+        <p:cNvGrpSpPr/>
+        <p:nvPr/>
+      </p:nvGrpSpPr>
+      <p:grpSpPr/>
+      <p:sp>
+        <p:nvSpPr>
+          <p:cNvPr id="2" name="TextBox 1"/>
+          <p:cNvSpPr txBox="1"/>
+          <p:nvPr/>
+        </p:nvSpPr>
+        <p:spPr>
+          <a:xfrm>
+            <a:off x="548640" y="320040"/>
+            <a:ext cx="11094415" cy="274320"/>
+          </a:xfrm>
+          <a:prstGeom prst="rect">
+            <a:avLst/>
+          </a:prstGeom>
+          <a:noFill/>
+        </p:spPr>
+        <p:txBody>
+          <a:bodyPr wrap="square" anchor="t" lIns="0" rIns="0" tIns="0" bIns="0"/>
+          <a:lstStyle/>
+          <a:p>
+            <a:pPr algn="l"/>
+            <a:r>
+              <a:rPr sz="1100" b="1" i="0">
+                <a:solidFill>
+                  <a:srgbClr val="A9C8F0"/>
+                </a:solidFill>
+                <a:latin typeface="Calibri"/>
+              </a:rPr>
+              <a:t>MECHANICAL ENGINEERING  ·  Mechanical: Performance Outcome 2</a:t>
+            </a:r>
+          </a:p>
+        </p:txBody>
+      </p:sp>
+      <p:sp>
+        <p:nvSpPr>
+          <p:cNvPr id="3" name="TextBox 2"/>
+          <p:cNvSpPr txBox="1"/>
+          <p:nvPr/>
+        </p:nvSpPr>
+        <p:spPr>
+          <a:xfrm>
+            <a:off x="548640" y="566928"/>
+            <a:ext cx="11094415" cy="822960"/>
+          </a:xfrm>
+          <a:prstGeom prst="rect">
+            <a:avLst/>
+          </a:prstGeom>
+          <a:noFill/>
+        </p:spPr>
+        <p:txBody>
+          <a:bodyPr wrap="square" anchor="ctr" lIns="0" rIns="0" tIns="0" bIns="0"/>
+          <a:lstStyle/>
+          <a:p>
+            <a:pPr algn="l"/>
+            <a:r>
+              <a:rPr sz="3200" b="1" i="0">
+                <a:solidFill>
+                  <a:srgbClr val="FFFFFF"/>
+                </a:solidFill>
+                <a:latin typeface="Cambria"/>
+              </a:rPr>
+              <a:t>Exit ticket</a:t>
+            </a:r>
+          </a:p>
+        </p:txBody>
+      </p:sp>
+      <p:sp>
+        <p:nvSpPr>
+          <p:cNvPr id="4" name="Oval 3"/>
+          <p:cNvSpPr/>
+          <p:nvPr/>
+        </p:nvSpPr>
+        <p:spPr>
+          <a:xfrm>
+            <a:off x="548640" y="1737360"/>
+            <a:ext cx="502920" cy="502920"/>
+          </a:xfrm>
+          <a:prstGeom prst="ellipse">
+            <a:avLst/>
+          </a:prstGeom>
+          <a:solidFill>
+            <a:srgbClr val="E0463A"/>
+          </a:solidFill>
+          <a:ln>
+            <a:noFill/>
+          </a:ln>
+          <a:effectLst/>
+        </p:spPr>
+        <p:style>
+          <a:lnRef idx="1">
+            <a:schemeClr val="accent1"/>
+          </a:lnRef>
+          <a:fillRef idx="3">
+            <a:schemeClr val="accent1"/>
+          </a:fillRef>
+          <a:effectRef idx="2">
+            <a:schemeClr val="accent1"/>
+          </a:effectRef>
+          <a:fontRef idx="minor">
+            <a:schemeClr val="lt1"/>
+          </a:fontRef>
+        </p:style>
+        <p:txBody>
+          <a:bodyPr rtlCol="0" anchor="ctr" lIns="0" rIns="0" tIns="0" bIns="0"/>
+          <a:lstStyle/>
+          <a:p>
+            <a:pPr algn="ctr"/>
+            <a:r>
+              <a:rPr sz="1700" b="1">
+                <a:solidFill>
+                  <a:srgbClr val="FFFFFF"/>
+                </a:solidFill>
+                <a:latin typeface="Calibri"/>
+              </a:rPr>
+              <a:t>1</a:t>
+            </a:r>
+          </a:p>
+        </p:txBody>
+      </p:sp>
+      <p:sp>
+        <p:nvSpPr>
+          <p:cNvPr id="5" name="TextBox 4"/>
+          <p:cNvSpPr txBox="1"/>
+          <p:nvPr/>
+        </p:nvSpPr>
+        <p:spPr>
+          <a:xfrm>
+            <a:off x="1325880" y="1645920"/>
+            <a:ext cx="6583680" cy="822960"/>
+          </a:xfrm>
+          <a:prstGeom prst="rect">
+            <a:avLst/>
+          </a:prstGeom>
+          <a:noFill/>
+        </p:spPr>
+        <p:txBody>
+          <a:bodyPr wrap="square" anchor="ctr" lIns="0" rIns="0" tIns="0" bIns="0"/>
+          <a:lstStyle/>
+          <a:p>
+            <a:pPr algn="l"/>
+            <a:r>
+              <a:rPr sz="2000" b="0" i="0">
+                <a:solidFill>
+                  <a:srgbClr val="FFFFFF"/>
+                </a:solidFill>
+                <a:latin typeface="Calibri"/>
+              </a:rPr>
+              <a:t>Who should you tell about an error in a drawing?</a:t>
+            </a:r>
+          </a:p>
+        </p:txBody>
+      </p:sp>
+      <p:sp>
+        <p:nvSpPr>
+          <p:cNvPr id="6" name="Oval 5"/>
+          <p:cNvSpPr/>
+          <p:nvPr/>
+        </p:nvSpPr>
+        <p:spPr>
+          <a:xfrm>
+            <a:off x="548640" y="2697480"/>
+            <a:ext cx="502920" cy="502920"/>
+          </a:xfrm>
+          <a:prstGeom prst="ellipse">
+            <a:avLst/>
+          </a:prstGeom>
+          <a:solidFill>
+            <a:srgbClr val="E0463A"/>
+          </a:solidFill>
+          <a:ln>
+            <a:noFill/>
+          </a:ln>
+          <a:effectLst/>
+        </p:spPr>
+        <p:style>
+          <a:lnRef idx="1">
+            <a:schemeClr val="accent1"/>
+          </a:lnRef>
+          <a:fillRef idx="3">
+            <a:schemeClr val="accent1"/>
+          </a:fillRef>
+          <a:effectRef idx="2">
+            <a:schemeClr val="accent1"/>
+          </a:effectRef>
+          <a:fontRef idx="minor">
+            <a:schemeClr val="lt1"/>
+          </a:fontRef>
+        </p:style>
+        <p:txBody>
+          <a:bodyPr rtlCol="0" anchor="ctr" lIns="0" rIns="0" tIns="0" bIns="0"/>
+          <a:lstStyle/>
+          <a:p>
+            <a:pPr algn="ctr"/>
+            <a:r>
+              <a:rPr sz="1700" b="1">
+                <a:solidFill>
+                  <a:srgbClr val="FFFFFF"/>
+                </a:solidFill>
+                <a:latin typeface="Calibri"/>
+              </a:rPr>
+              <a:t>2</a:t>
+            </a:r>
+          </a:p>
+        </p:txBody>
+      </p:sp>
+      <p:sp>
+        <p:nvSpPr>
+          <p:cNvPr id="7" name="TextBox 6"/>
+          <p:cNvSpPr txBox="1"/>
+          <p:nvPr/>
+        </p:nvSpPr>
+        <p:spPr>
+          <a:xfrm>
+            <a:off x="1325880" y="2606040"/>
+            <a:ext cx="6583680" cy="822960"/>
+          </a:xfrm>
+          <a:prstGeom prst="rect">
+            <a:avLst/>
+          </a:prstGeom>
+          <a:noFill/>
+        </p:spPr>
+        <p:txBody>
+          <a:bodyPr wrap="square" anchor="ctr" lIns="0" rIns="0" tIns="0" bIns="0"/>
+          <a:lstStyle/>
+          <a:p>
+            <a:pPr algn="l"/>
+            <a:r>
+              <a:rPr sz="2000" b="0" i="0">
+                <a:solidFill>
+                  <a:srgbClr val="FFFFFF"/>
+                </a:solidFill>
+                <a:latin typeface="Calibri"/>
+              </a:rPr>
+              <a:t>How would you control scope creep?</a:t>
+            </a:r>
+          </a:p>
+        </p:txBody>
+      </p:sp>
+      <p:sp>
+        <p:nvSpPr>
+          <p:cNvPr id="8" name="Oval 7"/>
+          <p:cNvSpPr/>
+          <p:nvPr/>
+        </p:nvSpPr>
+        <p:spPr>
+          <a:xfrm>
+            <a:off x="548640" y="3657600"/>
+            <a:ext cx="502920" cy="502920"/>
+          </a:xfrm>
+          <a:prstGeom prst="ellipse">
+            <a:avLst/>
+          </a:prstGeom>
+          <a:solidFill>
+            <a:srgbClr val="E0463A"/>
+          </a:solidFill>
+          <a:ln>
+            <a:noFill/>
+          </a:ln>
+          <a:effectLst/>
+        </p:spPr>
+        <p:style>
+          <a:lnRef idx="1">
+            <a:schemeClr val="accent1"/>
+          </a:lnRef>
+          <a:fillRef idx="3">
+            <a:schemeClr val="accent1"/>
+          </a:fillRef>
+          <a:effectRef idx="2">
+            <a:schemeClr val="accent1"/>
+          </a:effectRef>
+          <a:fontRef idx="minor">
+            <a:schemeClr val="lt1"/>
+          </a:fontRef>
+        </p:style>
+        <p:txBody>
+          <a:bodyPr rtlCol="0" anchor="ctr" lIns="0" rIns="0" tIns="0" bIns="0"/>
+          <a:lstStyle/>
+          <a:p>
+            <a:pPr algn="ctr"/>
+            <a:r>
+              <a:rPr sz="1700" b="1">
+                <a:solidFill>
+                  <a:srgbClr val="FFFFFF"/>
+                </a:solidFill>
+                <a:latin typeface="Calibri"/>
+              </a:rPr>
+              <a:t>3</a:t>
+            </a:r>
+          </a:p>
+        </p:txBody>
+      </p:sp>
+      <p:sp>
+        <p:nvSpPr>
+          <p:cNvPr id="9" name="TextBox 8"/>
+          <p:cNvSpPr txBox="1"/>
+          <p:nvPr/>
+        </p:nvSpPr>
+        <p:spPr>
+          <a:xfrm>
+            <a:off x="1325880" y="3566160"/>
+            <a:ext cx="6583680" cy="822960"/>
+          </a:xfrm>
+          <a:prstGeom prst="rect">
+            <a:avLst/>
+          </a:prstGeom>
+          <a:noFill/>
+        </p:spPr>
+        <p:txBody>
+          <a:bodyPr wrap="square" anchor="ctr" lIns="0" rIns="0" tIns="0" bIns="0"/>
+          <a:lstStyle/>
+          <a:p>
+            <a:pPr algn="l"/>
+            <a:r>
+              <a:rPr sz="2000" b="0" i="0">
+                <a:solidFill>
+                  <a:srgbClr val="FFFFFF"/>
+                </a:solidFill>
+                <a:latin typeface="Calibri"/>
+              </a:rPr>
+              <a:t>Which verification method is cheapest?</a:t>
+            </a:r>
+          </a:p>
+        </p:txBody>
+      </p:sp>
+      <p:sp>
+        <p:nvSpPr>
+          <p:cNvPr id="10" name="Rounded Rectangle 9"/>
+          <p:cNvSpPr/>
+          <p:nvPr/>
+        </p:nvSpPr>
+        <p:spPr>
+          <a:xfrm>
+            <a:off x="8229600" y="1645920"/>
+            <a:ext cx="3410712" cy="2926080"/>
+          </a:xfrm>
+          <a:prstGeom prst="roundRect">
+            <a:avLst>
+              <a:gd name="adj" fmla="val 8000"/>
+            </a:avLst>
+          </a:prstGeom>
+          <a:solidFill>
+            <a:srgbClr val="0645AD"/>
+          </a:solidFill>
+          <a:ln>
+            <a:noFill/>
+          </a:ln>
+          <a:effectLst/>
+        </p:spPr>
+        <p:style>
+          <a:lnRef idx="1">
+            <a:schemeClr val="accent1"/>
+          </a:lnRef>
+          <a:fillRef idx="3">
+            <a:schemeClr val="accent1"/>
+          </a:fillRef>
+          <a:effectRef idx="2">
+            <a:schemeClr val="accent1"/>
+          </a:effectRef>
+          <a:fontRef idx="minor">
+            <a:schemeClr val="lt1"/>
+          </a:fontRef>
+        </p:style>
+        <p:txBody>
+          <a:bodyPr rtlCol="0" anchor="ctr"/>
+          <a:lstStyle/>
+          <a:p/>
+        </p:txBody>
+      </p:sp>
+      <p:sp>
+        <p:nvSpPr>
+          <p:cNvPr id="11" name="TextBox 10"/>
+          <p:cNvSpPr txBox="1"/>
+          <p:nvPr/>
+        </p:nvSpPr>
+        <p:spPr>
+          <a:xfrm>
+            <a:off x="8503920" y="1874519"/>
+            <a:ext cx="2926080" cy="365760"/>
+          </a:xfrm>
+          <a:prstGeom prst="rect">
+            <a:avLst/>
+          </a:prstGeom>
+          <a:noFill/>
+        </p:spPr>
+        <p:txBody>
+          <a:bodyPr wrap="square" anchor="t" lIns="0" rIns="0" tIns="0" bIns="0"/>
+          <a:lstStyle/>
+          <a:p>
+            <a:pPr algn="l"/>
+            <a:r>
+              <a:rPr sz="1300" b="1" i="0">
+                <a:solidFill>
+                  <a:srgbClr val="A9C8F0"/>
+                </a:solidFill>
+                <a:latin typeface="Calibri"/>
+              </a:rPr>
+              <a:t>REVISE THIS TOPIC</a:t>
+            </a:r>
+          </a:p>
+        </p:txBody>
+      </p:sp>
+      <p:sp>
+        <p:nvSpPr>
+          <p:cNvPr id="12" name="TextBox 11"/>
+          <p:cNvSpPr txBox="1"/>
+          <p:nvPr/>
+        </p:nvSpPr>
+        <p:spPr>
+          <a:xfrm>
+            <a:off x="8503920" y="2286000"/>
+            <a:ext cx="2926080" cy="548640"/>
+          </a:xfrm>
+          <a:prstGeom prst="rect">
+            <a:avLst/>
+          </a:prstGeom>
+          <a:noFill/>
+        </p:spPr>
+        <p:txBody>
+          <a:bodyPr wrap="square" anchor="t" lIns="0" rIns="0" tIns="0" bIns="0"/>
+          <a:lstStyle/>
+          <a:p>
+            <a:pPr algn="l"/>
+            <a:r>
+              <a:rPr sz="1400" b="0" i="0">
+                <a:solidFill>
+                  <a:srgbClr val="FFFFFF"/>
+                </a:solidFill>
+                <a:latin typeface="Calibri"/>
+              </a:rPr>
+              <a:t>Revision notes for this lesson are on the study wiki:</a:t>
+            </a:r>
+          </a:p>
+        </p:txBody>
+      </p:sp>
+      <p:sp>
+        <p:nvSpPr>
+          <p:cNvPr id="13" name="TextBox 12"/>
+          <p:cNvSpPr txBox="1"/>
+          <p:nvPr/>
+        </p:nvSpPr>
+        <p:spPr>
+          <a:xfrm>
+            <a:off x="8503920" y="2926080"/>
+            <a:ext cx="2926080" cy="1463040"/>
+          </a:xfrm>
+          <a:prstGeom prst="rect">
+            <a:avLst/>
+          </a:prstGeom>
+          <a:noFill/>
+        </p:spPr>
+        <p:txBody>
+          <a:bodyPr wrap="square" anchor="t" lIns="0" rIns="0" tIns="0" bIns="0"/>
+          <a:lstStyle/>
+          <a:p>
+            <a:pPr algn="l"/>
+            <a:r>
+              <a:rPr sz="2000" b="1" i="0">
+                <a:solidFill>
+                  <a:srgbClr val="FFFFFF"/>
+                </a:solidFill>
+                <a:latin typeface="Cambria"/>
+              </a:rPr>
+              <a:t>Practical Criteria</a:t>
+            </a:r>
+          </a:p>
+        </p:txBody>
+      </p:sp>
+      <p:sp>
+        <p:nvSpPr>
+          <p:cNvPr id="14" name="TextBox 13"/>
+          <p:cNvSpPr txBox="1"/>
+          <p:nvPr/>
+        </p:nvSpPr>
+        <p:spPr>
+          <a:xfrm>
+            <a:off x="548640" y="5669280"/>
+            <a:ext cx="11094415" cy="548640"/>
+          </a:xfrm>
+          <a:prstGeom prst="rect">
+            <a:avLst/>
+          </a:prstGeom>
+          <a:noFill/>
+        </p:spPr>
+        <p:txBody>
+          <a:bodyPr wrap="square" anchor="t" lIns="0" rIns="0" tIns="0" bIns="0"/>
+          <a:lstStyle/>
+          <a:p>
+            <a:pPr algn="l"/>
+            <a:r>
+              <a:rPr sz="1200" b="0" i="0">
+                <a:solidFill>
+                  <a:srgbClr val="A9C8F0"/>
+                </a:solidFill>
+                <a:latin typeface="Calibri"/>
+              </a:rPr>
+              <a:t>https://lana6478.github.io/T-level-Design-Development-Engineering-Manufacturing/#/02-occupational-specialism/02-practical-criteria.md</a:t>
+            </a:r>
+          </a:p>
+        </p:txBody>
+      </p:sp>
+    </p:spTree>
+  </p:cSld>
+  <p:clrMapOvr>
+    <a:masterClrMapping/>
+  </p:clrMapOvr>
+</p:sld>
+</file>
+
 <file path=ppt/slides/slide2.xml><?xml version="1.0" encoding="utf-8"?>
 <p:sld xmlns:a="http://schemas.openxmlformats.org/drawingml/2006/main" xmlns:p="http://schemas.openxmlformats.org/presentationml/2006/main" xmlns:r="http://schemas.openxmlformats.org/officeDocument/2006/relationships">
   <p:cSld>
@@ -5588,8 +7928,8 @@
         </p:nvSpPr>
         <p:spPr>
           <a:xfrm>
-            <a:off x="548640" y="1600200"/>
-            <a:ext cx="6675120" cy="4572000"/>
+            <a:off x="548640" y="1554480"/>
+            <a:ext cx="6720840" cy="4617720"/>
           </a:xfrm>
           <a:prstGeom prst="rect">
             <a:avLst/>
@@ -5602,105 +7942,51 @@
           </a:bodyPr>
           <a:lstStyle/>
           <a:p>
-            <a:pPr marL="274320" indent="-274320">
+            <a:pPr>
               <a:spcAft>
-                <a:spcPts val="1080"/>
+                <a:spcPts val="1320"/>
               </a:spcAft>
-              <a:buClr>
-                <a:srgbClr val="0645AD"/>
-              </a:buClr>
-              <a:buFont typeface="Arial"/>
-              <a:buChar char="•"/>
             </a:pPr>
             <a:r>
-              <a:rPr sz="2400" b="1">
+              <a:rPr sz="2200" b="0">
                 <a:solidFill>
                   <a:srgbClr val="202122"/>
                 </a:solidFill>
                 <a:latin typeface="Calibri"/>
               </a:rPr>
-              <a:t>Scope creep:</a:t>
-            </a:r>
-            <a:r>
-              <a:rPr sz="2400" b="0">
+              <a:t>Scope creep is when a project's requirements grow bit by bit without being properly agreed: 'just one more feature'. Each change adds cost and time, and together they can wreck a schedule or budget.</a:t>
+            </a:r>
+          </a:p>
+          <a:p>
+            <a:pPr>
+              <a:spcAft>
+                <a:spcPts val="1320"/>
+              </a:spcAft>
+            </a:pPr>
+            <a:r>
+              <a:rPr sz="2200" b="0">
                 <a:solidFill>
                   <a:srgbClr val="202122"/>
                 </a:solidFill>
                 <a:latin typeface="Calibri"/>
               </a:rPr>
-              <a:t> requirements grow without control.</a:t>
-            </a:r>
-          </a:p>
-          <a:p>
-            <a:pPr marL="274320" indent="-274320">
+              <a:t>Process-driven change happens when manufacturing limits force a redesign, such as a tolerance the machines can't hold.</a:t>
+            </a:r>
+          </a:p>
+          <a:p>
+            <a:pPr>
               <a:spcAft>
-                <a:spcPts val="1080"/>
+                <a:spcPts val="1320"/>
               </a:spcAft>
-              <a:buClr>
-                <a:srgbClr val="0645AD"/>
-              </a:buClr>
-              <a:buFont typeface="Arial"/>
-              <a:buChar char="•"/>
             </a:pPr>
             <a:r>
-              <a:rPr sz="2400" b="1">
+              <a:rPr sz="2200" b="0">
                 <a:solidFill>
                   <a:srgbClr val="202122"/>
                 </a:solidFill>
                 <a:latin typeface="Calibri"/>
               </a:rPr>
-              <a:t>Process-driven change:</a:t>
-            </a:r>
-            <a:r>
-              <a:rPr sz="2400" b="0">
-                <a:solidFill>
-                  <a:srgbClr val="202122"/>
-                </a:solidFill>
-                <a:latin typeface="Calibri"/>
-              </a:rPr>
-              <a:t> manufacturing limits force a redesign.</a:t>
-            </a:r>
-          </a:p>
-          <a:p>
-            <a:pPr marL="274320" indent="-274320">
-              <a:spcAft>
-                <a:spcPts val="1080"/>
-              </a:spcAft>
-              <a:buClr>
-                <a:srgbClr val="0645AD"/>
-              </a:buClr>
-              <a:buFont typeface="Arial"/>
-              <a:buChar char="•"/>
-            </a:pPr>
-            <a:r>
-              <a:rPr sz="2400" b="0">
-                <a:solidFill>
-                  <a:srgbClr val="202122"/>
-                </a:solidFill>
-                <a:latin typeface="Calibri"/>
-              </a:rPr>
-              <a:t>Record every change and its impact on cost and time.</a:t>
-            </a:r>
-          </a:p>
-          <a:p>
-            <a:pPr marL="274320" indent="-274320">
-              <a:spcAft>
-                <a:spcPts val="1080"/>
-              </a:spcAft>
-              <a:buClr>
-                <a:srgbClr val="0645AD"/>
-              </a:buClr>
-              <a:buFont typeface="Arial"/>
-              <a:buChar char="•"/>
-            </a:pPr>
-            <a:r>
-              <a:rPr sz="2400" b="0">
-                <a:solidFill>
-                  <a:srgbClr val="202122"/>
-                </a:solidFill>
-                <a:latin typeface="Calibri"/>
-              </a:rPr>
-              <a:t>Escalate or report changes that affect the agreed brief.</a:t>
+              <a:t>Manage both by recording every change, assessing its impact on cost, time and risk, getting it agreed, and escalating anything that affects the original brief.</a:t>
             </a:r>
           </a:p>
         </p:txBody>
@@ -5713,8 +7999,8 @@
         </p:nvSpPr>
         <p:spPr>
           <a:xfrm>
-            <a:off x="7772400" y="1600200"/>
-            <a:ext cx="3867912" cy="4434840"/>
+            <a:off x="7772400" y="1554480"/>
+            <a:ext cx="3867912" cy="4526280"/>
           </a:xfrm>
           <a:prstGeom prst="roundRect">
             <a:avLst>
@@ -5757,7 +8043,7 @@
         </p:nvSpPr>
         <p:spPr>
           <a:xfrm>
-            <a:off x="8046720" y="1874519"/>
+            <a:off x="8046720" y="1828800"/>
             <a:ext cx="548640" cy="548640"/>
           </a:xfrm>
           <a:prstGeom prst="ellipse">
@@ -5791,13 +8077,13 @@
           <a:p>
             <a:pPr algn="ctr"/>
             <a:r>
-              <a:rPr sz="2000" b="1">
+              <a:rPr sz="1300" b="1">
                 <a:solidFill>
                   <a:srgbClr val="FFFFFF"/>
                 </a:solidFill>
                 <a:latin typeface="Calibri"/>
               </a:rPr>
-              <a:t>!</a:t>
+              <a:t>e.g.</a:t>
             </a:r>
           </a:p>
         </p:txBody>
@@ -5810,7 +8096,7 @@
         </p:nvSpPr>
         <p:spPr>
           <a:xfrm>
-            <a:off x="8046720" y="2606040"/>
+            <a:off x="8046720" y="2560320"/>
             <a:ext cx="3291840" cy="365760"/>
           </a:xfrm>
           <a:prstGeom prst="rect">
@@ -5830,7 +8116,7 @@
                 </a:solidFill>
                 <a:latin typeface="Calibri"/>
               </a:rPr>
-              <a:t>KEY IDEA</a:t>
+              <a:t>EXAMPLE</a:t>
             </a:r>
           </a:p>
         </p:txBody>
@@ -5843,8 +8129,8 @@
         </p:nvSpPr>
         <p:spPr>
           <a:xfrm>
-            <a:off x="8046720" y="3017520"/>
-            <a:ext cx="3291840" cy="2926080"/>
+            <a:off x="8046720" y="2971800"/>
+            <a:ext cx="3291840" cy="2971800"/>
           </a:xfrm>
           <a:prstGeom prst="rect">
             <a:avLst/>
@@ -5857,13 +8143,13 @@
           <a:p>
             <a:pPr algn="l"/>
             <a:r>
-              <a:rPr sz="2200" b="0" i="0">
+              <a:rPr sz="1900" b="0" i="0">
                 <a:solidFill>
                   <a:srgbClr val="FFFFFF"/>
                 </a:solidFill>
                 <a:latin typeface="Cambria"/>
               </a:rPr>
-              <a:t>Every 'small' change costs time and money. Log it before you act on it.</a:t>
+              <a:t>A client asks for a bracket to also hold a cable tidy. Logged as a change, it adds two days and 300 pounds, and the client agrees before work starts.</a:t>
             </a:r>
           </a:p>
         </p:txBody>
@@ -5955,7 +8241,7 @@
                 </a:solidFill>
                 <a:latin typeface="Cambria"/>
               </a:rPr>
-              <a:t>Verifying design information</a:t>
+              <a:t>Scope creep and design change</a:t>
             </a:r>
           </a:p>
         </p:txBody>
@@ -6028,22 +8314,147 @@
       </p:sp>
       <p:sp>
         <p:nvSpPr>
-          <p:cNvPr id="6" name="Rounded Rectangle 5"/>
+          <p:cNvPr id="6" name="TextBox 5"/>
+          <p:cNvSpPr txBox="1"/>
+          <p:nvPr/>
+        </p:nvSpPr>
+        <p:spPr>
+          <a:xfrm>
+            <a:off x="548640" y="1600200"/>
+            <a:ext cx="6675120" cy="4572000"/>
+          </a:xfrm>
+          <a:prstGeom prst="rect">
+            <a:avLst/>
+          </a:prstGeom>
+          <a:noFill/>
+        </p:spPr>
+        <p:txBody>
+          <a:bodyPr wrap="square" lIns="0" rIns="0" tIns="0" bIns="0">
+            <a:spAutoFit/>
+          </a:bodyPr>
+          <a:lstStyle/>
+          <a:p>
+            <a:pPr marL="274320" indent="-274320">
+              <a:spcAft>
+                <a:spcPts val="1080"/>
+              </a:spcAft>
+              <a:buClr>
+                <a:srgbClr val="0645AD"/>
+              </a:buClr>
+              <a:buFont typeface="Arial"/>
+              <a:buChar char="•"/>
+            </a:pPr>
+            <a:r>
+              <a:rPr sz="2400" b="1">
+                <a:solidFill>
+                  <a:srgbClr val="202122"/>
+                </a:solidFill>
+                <a:latin typeface="Calibri"/>
+              </a:rPr>
+              <a:t>Scope creep:</a:t>
+            </a:r>
+            <a:r>
+              <a:rPr sz="2400" b="0">
+                <a:solidFill>
+                  <a:srgbClr val="202122"/>
+                </a:solidFill>
+                <a:latin typeface="Calibri"/>
+              </a:rPr>
+              <a:t> requirements grow without control.</a:t>
+            </a:r>
+          </a:p>
+          <a:p>
+            <a:pPr marL="274320" indent="-274320">
+              <a:spcAft>
+                <a:spcPts val="1080"/>
+              </a:spcAft>
+              <a:buClr>
+                <a:srgbClr val="0645AD"/>
+              </a:buClr>
+              <a:buFont typeface="Arial"/>
+              <a:buChar char="•"/>
+            </a:pPr>
+            <a:r>
+              <a:rPr sz="2400" b="1">
+                <a:solidFill>
+                  <a:srgbClr val="202122"/>
+                </a:solidFill>
+                <a:latin typeface="Calibri"/>
+              </a:rPr>
+              <a:t>Process-driven change:</a:t>
+            </a:r>
+            <a:r>
+              <a:rPr sz="2400" b="0">
+                <a:solidFill>
+                  <a:srgbClr val="202122"/>
+                </a:solidFill>
+                <a:latin typeface="Calibri"/>
+              </a:rPr>
+              <a:t> manufacturing limits force a redesign.</a:t>
+            </a:r>
+          </a:p>
+          <a:p>
+            <a:pPr marL="274320" indent="-274320">
+              <a:spcAft>
+                <a:spcPts val="1080"/>
+              </a:spcAft>
+              <a:buClr>
+                <a:srgbClr val="0645AD"/>
+              </a:buClr>
+              <a:buFont typeface="Arial"/>
+              <a:buChar char="•"/>
+            </a:pPr>
+            <a:r>
+              <a:rPr sz="2400" b="0">
+                <a:solidFill>
+                  <a:srgbClr val="202122"/>
+                </a:solidFill>
+                <a:latin typeface="Calibri"/>
+              </a:rPr>
+              <a:t>Record every change and its impact on cost and time.</a:t>
+            </a:r>
+          </a:p>
+          <a:p>
+            <a:pPr marL="274320" indent="-274320">
+              <a:spcAft>
+                <a:spcPts val="1080"/>
+              </a:spcAft>
+              <a:buClr>
+                <a:srgbClr val="0645AD"/>
+              </a:buClr>
+              <a:buFont typeface="Arial"/>
+              <a:buChar char="•"/>
+            </a:pPr>
+            <a:r>
+              <a:rPr sz="2400" b="0">
+                <a:solidFill>
+                  <a:srgbClr val="202122"/>
+                </a:solidFill>
+                <a:latin typeface="Calibri"/>
+              </a:rPr>
+              <a:t>Escalate or report changes that affect the agreed brief.</a:t>
+            </a:r>
+          </a:p>
+        </p:txBody>
+      </p:sp>
+      <p:sp>
+        <p:nvSpPr>
+          <p:cNvPr id="7" name="Rounded Rectangle 6"/>
           <p:cNvSpPr/>
           <p:nvPr/>
         </p:nvSpPr>
         <p:spPr>
           <a:xfrm>
-            <a:off x="548640" y="1600200"/>
-            <a:ext cx="5410047" cy="2148840"/>
+            <a:off x="7772400" y="1600200"/>
+            <a:ext cx="3867912" cy="4434840"/>
           </a:xfrm>
           <a:prstGeom prst="roundRect">
             <a:avLst>
-              <a:gd name="adj" fmla="val 6000"/>
+              <a:gd name="adj" fmla="val 8000"/>
             </a:avLst>
           </a:prstGeom>
           <a:solidFill>
-            <a:srgbClr val="EAF3FF"/>
+            <a:srgbClr val="03306E"/>
           </a:solidFill>
           <a:ln>
             <a:noFill/>
@@ -6072,14 +8483,14 @@
       </p:sp>
       <p:sp>
         <p:nvSpPr>
-          <p:cNvPr id="7" name="Oval 6"/>
+          <p:cNvPr id="8" name="Oval 7"/>
           <p:cNvSpPr/>
           <p:nvPr/>
         </p:nvSpPr>
         <p:spPr>
           <a:xfrm>
-            <a:off x="777240" y="1828800"/>
-            <a:ext cx="457200" cy="457200"/>
+            <a:off x="8046720" y="1874519"/>
+            <a:ext cx="548640" cy="548640"/>
           </a:xfrm>
           <a:prstGeom prst="ellipse">
             <a:avLst/>
@@ -6112,46 +8523,13 @@
           <a:p>
             <a:pPr algn="ctr"/>
             <a:r>
-              <a:rPr sz="1500" b="1">
+              <a:rPr sz="2000" b="1">
                 <a:solidFill>
                   <a:srgbClr val="FFFFFF"/>
                 </a:solidFill>
                 <a:latin typeface="Calibri"/>
               </a:rPr>
-              <a:t>1</a:t>
-            </a:r>
-          </a:p>
-        </p:txBody>
-      </p:sp>
-      <p:sp>
-        <p:nvSpPr>
-          <p:cNvPr id="8" name="TextBox 7"/>
-          <p:cNvSpPr txBox="1"/>
-          <p:nvPr/>
-        </p:nvSpPr>
-        <p:spPr>
-          <a:xfrm>
-            <a:off x="1371600" y="1801368"/>
-            <a:ext cx="4404207" cy="512064"/>
-          </a:xfrm>
-          <a:prstGeom prst="rect">
-            <a:avLst/>
-          </a:prstGeom>
-          <a:noFill/>
-        </p:spPr>
-        <p:txBody>
-          <a:bodyPr wrap="square" anchor="ctr" lIns="0" rIns="0" tIns="0" bIns="0"/>
-          <a:lstStyle/>
-          <a:p>
-            <a:pPr algn="l"/>
-            <a:r>
-              <a:rPr sz="1900" b="1" i="0">
-                <a:solidFill>
-                  <a:srgbClr val="03306E"/>
-                </a:solidFill>
-                <a:latin typeface="Calibri"/>
-              </a:rPr>
-              <a:t>Against requirements</a:t>
+              <a:t>!</a:t>
             </a:r>
           </a:p>
         </p:txBody>
@@ -6164,8 +8542,8 @@
         </p:nvSpPr>
         <p:spPr>
           <a:xfrm>
-            <a:off x="777240" y="2468880"/>
-            <a:ext cx="4952847" cy="1143000"/>
+            <a:off x="8046720" y="2606040"/>
+            <a:ext cx="3291840" cy="365760"/>
           </a:xfrm>
           <a:prstGeom prst="rect">
             <a:avLst/>
@@ -6178,502 +8556,46 @@
           <a:p>
             <a:pPr algn="l"/>
             <a:r>
-              <a:rPr sz="2000" b="0" i="0">
-                <a:solidFill>
-                  <a:srgbClr val="202122"/>
-                </a:solidFill>
-                <a:latin typeface="Calibri"/>
-              </a:rPr>
-              <a:t>Components, materials, application, location, risk, environment.</a:t>
-            </a:r>
-          </a:p>
-        </p:txBody>
-      </p:sp>
-      <p:sp>
-        <p:nvSpPr>
-          <p:cNvPr id="10" name="Rounded Rectangle 9"/>
-          <p:cNvSpPr/>
-          <p:nvPr/>
-        </p:nvSpPr>
-        <p:spPr>
-          <a:xfrm>
-            <a:off x="6233007" y="1600200"/>
-            <a:ext cx="5410047" cy="2148840"/>
-          </a:xfrm>
-          <a:prstGeom prst="roundRect">
-            <a:avLst>
-              <a:gd name="adj" fmla="val 6000"/>
-            </a:avLst>
-          </a:prstGeom>
-          <a:solidFill>
-            <a:srgbClr val="EAF3FF"/>
-          </a:solidFill>
-          <a:ln>
-            <a:noFill/>
-          </a:ln>
-          <a:effectLst/>
-        </p:spPr>
-        <p:style>
-          <a:lnRef idx="1">
-            <a:schemeClr val="accent1"/>
-          </a:lnRef>
-          <a:fillRef idx="3">
-            <a:schemeClr val="accent1"/>
-          </a:fillRef>
-          <a:effectRef idx="2">
-            <a:schemeClr val="accent1"/>
-          </a:effectRef>
-          <a:fontRef idx="minor">
-            <a:schemeClr val="lt1"/>
-          </a:fontRef>
-        </p:style>
-        <p:txBody>
-          <a:bodyPr rtlCol="0" anchor="ctr"/>
-          <a:lstStyle/>
-          <a:p/>
-        </p:txBody>
-      </p:sp>
-      <p:sp>
-        <p:nvSpPr>
-          <p:cNvPr id="11" name="Oval 10"/>
-          <p:cNvSpPr/>
-          <p:nvPr/>
-        </p:nvSpPr>
-        <p:spPr>
-          <a:xfrm>
-            <a:off x="6461607" y="1828800"/>
-            <a:ext cx="457200" cy="457200"/>
-          </a:xfrm>
-          <a:prstGeom prst="ellipse">
-            <a:avLst/>
-          </a:prstGeom>
-          <a:solidFill>
-            <a:srgbClr val="E0463A"/>
-          </a:solidFill>
-          <a:ln>
-            <a:noFill/>
-          </a:ln>
-          <a:effectLst/>
-        </p:spPr>
-        <p:style>
-          <a:lnRef idx="1">
-            <a:schemeClr val="accent1"/>
-          </a:lnRef>
-          <a:fillRef idx="3">
-            <a:schemeClr val="accent1"/>
-          </a:fillRef>
-          <a:effectRef idx="2">
-            <a:schemeClr val="accent1"/>
-          </a:effectRef>
-          <a:fontRef idx="minor">
-            <a:schemeClr val="lt1"/>
-          </a:fontRef>
-        </p:style>
-        <p:txBody>
-          <a:bodyPr rtlCol="0" anchor="ctr" lIns="0" rIns="0" tIns="0" bIns="0"/>
-          <a:lstStyle/>
-          <a:p>
-            <a:pPr algn="ctr"/>
-            <a:r>
-              <a:rPr sz="1500" b="1">
+              <a:rPr sz="1300" b="1" i="0">
+                <a:solidFill>
+                  <a:srgbClr val="A9C8F0"/>
+                </a:solidFill>
+                <a:latin typeface="Calibri"/>
+              </a:rPr>
+              <a:t>KEY IDEA</a:t>
+            </a:r>
+          </a:p>
+        </p:txBody>
+      </p:sp>
+      <p:sp>
+        <p:nvSpPr>
+          <p:cNvPr id="10" name="TextBox 9"/>
+          <p:cNvSpPr txBox="1"/>
+          <p:nvPr/>
+        </p:nvSpPr>
+        <p:spPr>
+          <a:xfrm>
+            <a:off x="8046720" y="3017520"/>
+            <a:ext cx="3291840" cy="2926080"/>
+          </a:xfrm>
+          <a:prstGeom prst="rect">
+            <a:avLst/>
+          </a:prstGeom>
+          <a:noFill/>
+        </p:spPr>
+        <p:txBody>
+          <a:bodyPr wrap="square" anchor="t" lIns="0" rIns="0" tIns="0" bIns="0"/>
+          <a:lstStyle/>
+          <a:p>
+            <a:pPr algn="l"/>
+            <a:r>
+              <a:rPr sz="2200" b="0" i="0">
                 <a:solidFill>
                   <a:srgbClr val="FFFFFF"/>
                 </a:solidFill>
-                <a:latin typeface="Calibri"/>
-              </a:rPr>
-              <a:t>2</a:t>
-            </a:r>
-          </a:p>
-        </p:txBody>
-      </p:sp>
-      <p:sp>
-        <p:nvSpPr>
-          <p:cNvPr id="12" name="TextBox 11"/>
-          <p:cNvSpPr txBox="1"/>
-          <p:nvPr/>
-        </p:nvSpPr>
-        <p:spPr>
-          <a:xfrm>
-            <a:off x="7055967" y="1801368"/>
-            <a:ext cx="4404207" cy="512064"/>
-          </a:xfrm>
-          <a:prstGeom prst="rect">
-            <a:avLst/>
-          </a:prstGeom>
-          <a:noFill/>
-        </p:spPr>
-        <p:txBody>
-          <a:bodyPr wrap="square" anchor="ctr" lIns="0" rIns="0" tIns="0" bIns="0"/>
-          <a:lstStyle/>
-          <a:p>
-            <a:pPr algn="l"/>
-            <a:r>
-              <a:rPr sz="1900" b="1" i="0">
-                <a:solidFill>
-                  <a:srgbClr val="03306E"/>
-                </a:solidFill>
-                <a:latin typeface="Calibri"/>
-              </a:rPr>
-              <a:t>Calculations</a:t>
-            </a:r>
-          </a:p>
-        </p:txBody>
-      </p:sp>
-      <p:sp>
-        <p:nvSpPr>
-          <p:cNvPr id="13" name="TextBox 12"/>
-          <p:cNvSpPr txBox="1"/>
-          <p:nvPr/>
-        </p:nvSpPr>
-        <p:spPr>
-          <a:xfrm>
-            <a:off x="6461607" y="2468880"/>
-            <a:ext cx="4952847" cy="1143000"/>
-          </a:xfrm>
-          <a:prstGeom prst="rect">
-            <a:avLst/>
-          </a:prstGeom>
-          <a:noFill/>
-        </p:spPr>
-        <p:txBody>
-          <a:bodyPr wrap="square" anchor="t" lIns="0" rIns="0" tIns="0" bIns="0"/>
-          <a:lstStyle/>
-          <a:p>
-            <a:pPr algn="l"/>
-            <a:r>
-              <a:rPr sz="2000" b="0" i="0">
-                <a:solidFill>
-                  <a:srgbClr val="202122"/>
-                </a:solidFill>
-                <a:latin typeface="Calibri"/>
-              </a:rPr>
-              <a:t>Check loads, stresses and performance.</a:t>
-            </a:r>
-          </a:p>
-        </p:txBody>
-      </p:sp>
-      <p:sp>
-        <p:nvSpPr>
-          <p:cNvPr id="14" name="Rounded Rectangle 13"/>
-          <p:cNvSpPr/>
-          <p:nvPr/>
-        </p:nvSpPr>
-        <p:spPr>
-          <a:xfrm>
-            <a:off x="548640" y="4023360"/>
-            <a:ext cx="5410047" cy="2148840"/>
-          </a:xfrm>
-          <a:prstGeom prst="roundRect">
-            <a:avLst>
-              <a:gd name="adj" fmla="val 6000"/>
-            </a:avLst>
-          </a:prstGeom>
-          <a:solidFill>
-            <a:srgbClr val="EAF3FF"/>
-          </a:solidFill>
-          <a:ln>
-            <a:noFill/>
-          </a:ln>
-          <a:effectLst/>
-        </p:spPr>
-        <p:style>
-          <a:lnRef idx="1">
-            <a:schemeClr val="accent1"/>
-          </a:lnRef>
-          <a:fillRef idx="3">
-            <a:schemeClr val="accent1"/>
-          </a:fillRef>
-          <a:effectRef idx="2">
-            <a:schemeClr val="accent1"/>
-          </a:effectRef>
-          <a:fontRef idx="minor">
-            <a:schemeClr val="lt1"/>
-          </a:fontRef>
-        </p:style>
-        <p:txBody>
-          <a:bodyPr rtlCol="0" anchor="ctr"/>
-          <a:lstStyle/>
-          <a:p/>
-        </p:txBody>
-      </p:sp>
-      <p:sp>
-        <p:nvSpPr>
-          <p:cNvPr id="15" name="Oval 14"/>
-          <p:cNvSpPr/>
-          <p:nvPr/>
-        </p:nvSpPr>
-        <p:spPr>
-          <a:xfrm>
-            <a:off x="777240" y="4251960"/>
-            <a:ext cx="457200" cy="457200"/>
-          </a:xfrm>
-          <a:prstGeom prst="ellipse">
-            <a:avLst/>
-          </a:prstGeom>
-          <a:solidFill>
-            <a:srgbClr val="E0463A"/>
-          </a:solidFill>
-          <a:ln>
-            <a:noFill/>
-          </a:ln>
-          <a:effectLst/>
-        </p:spPr>
-        <p:style>
-          <a:lnRef idx="1">
-            <a:schemeClr val="accent1"/>
-          </a:lnRef>
-          <a:fillRef idx="3">
-            <a:schemeClr val="accent1"/>
-          </a:fillRef>
-          <a:effectRef idx="2">
-            <a:schemeClr val="accent1"/>
-          </a:effectRef>
-          <a:fontRef idx="minor">
-            <a:schemeClr val="lt1"/>
-          </a:fontRef>
-        </p:style>
-        <p:txBody>
-          <a:bodyPr rtlCol="0" anchor="ctr" lIns="0" rIns="0" tIns="0" bIns="0"/>
-          <a:lstStyle/>
-          <a:p>
-            <a:pPr algn="ctr"/>
-            <a:r>
-              <a:rPr sz="1500" b="1">
-                <a:solidFill>
-                  <a:srgbClr val="FFFFFF"/>
-                </a:solidFill>
-                <a:latin typeface="Calibri"/>
-              </a:rPr>
-              <a:t>3</a:t>
-            </a:r>
-          </a:p>
-        </p:txBody>
-      </p:sp>
-      <p:sp>
-        <p:nvSpPr>
-          <p:cNvPr id="16" name="TextBox 15"/>
-          <p:cNvSpPr txBox="1"/>
-          <p:nvPr/>
-        </p:nvSpPr>
-        <p:spPr>
-          <a:xfrm>
-            <a:off x="1371600" y="4224528"/>
-            <a:ext cx="4404207" cy="512064"/>
-          </a:xfrm>
-          <a:prstGeom prst="rect">
-            <a:avLst/>
-          </a:prstGeom>
-          <a:noFill/>
-        </p:spPr>
-        <p:txBody>
-          <a:bodyPr wrap="square" anchor="ctr" lIns="0" rIns="0" tIns="0" bIns="0"/>
-          <a:lstStyle/>
-          <a:p>
-            <a:pPr algn="l"/>
-            <a:r>
-              <a:rPr sz="1900" b="1" i="0">
-                <a:solidFill>
-                  <a:srgbClr val="03306E"/>
-                </a:solidFill>
-                <a:latin typeface="Calibri"/>
-              </a:rPr>
-              <a:t>CAD simulation</a:t>
-            </a:r>
-          </a:p>
-        </p:txBody>
-      </p:sp>
-      <p:sp>
-        <p:nvSpPr>
-          <p:cNvPr id="17" name="TextBox 16"/>
-          <p:cNvSpPr txBox="1"/>
-          <p:nvPr/>
-        </p:nvSpPr>
-        <p:spPr>
-          <a:xfrm>
-            <a:off x="777240" y="4892040"/>
-            <a:ext cx="4952847" cy="1143000"/>
-          </a:xfrm>
-          <a:prstGeom prst="rect">
-            <a:avLst/>
-          </a:prstGeom>
-          <a:noFill/>
-        </p:spPr>
-        <p:txBody>
-          <a:bodyPr wrap="square" anchor="t" lIns="0" rIns="0" tIns="0" bIns="0"/>
-          <a:lstStyle/>
-          <a:p>
-            <a:pPr algn="l"/>
-            <a:r>
-              <a:rPr sz="2000" b="0" i="0">
-                <a:solidFill>
-                  <a:srgbClr val="202122"/>
-                </a:solidFill>
-                <a:latin typeface="Calibri"/>
-              </a:rPr>
-              <a:t>Test the design virtually.</a:t>
-            </a:r>
-          </a:p>
-        </p:txBody>
-      </p:sp>
-      <p:sp>
-        <p:nvSpPr>
-          <p:cNvPr id="18" name="Rounded Rectangle 17"/>
-          <p:cNvSpPr/>
-          <p:nvPr/>
-        </p:nvSpPr>
-        <p:spPr>
-          <a:xfrm>
-            <a:off x="6233007" y="4023360"/>
-            <a:ext cx="5410047" cy="2148840"/>
-          </a:xfrm>
-          <a:prstGeom prst="roundRect">
-            <a:avLst>
-              <a:gd name="adj" fmla="val 6000"/>
-            </a:avLst>
-          </a:prstGeom>
-          <a:solidFill>
-            <a:srgbClr val="EAF3FF"/>
-          </a:solidFill>
-          <a:ln>
-            <a:noFill/>
-          </a:ln>
-          <a:effectLst/>
-        </p:spPr>
-        <p:style>
-          <a:lnRef idx="1">
-            <a:schemeClr val="accent1"/>
-          </a:lnRef>
-          <a:fillRef idx="3">
-            <a:schemeClr val="accent1"/>
-          </a:fillRef>
-          <a:effectRef idx="2">
-            <a:schemeClr val="accent1"/>
-          </a:effectRef>
-          <a:fontRef idx="minor">
-            <a:schemeClr val="lt1"/>
-          </a:fontRef>
-        </p:style>
-        <p:txBody>
-          <a:bodyPr rtlCol="0" anchor="ctr"/>
-          <a:lstStyle/>
-          <a:p/>
-        </p:txBody>
-      </p:sp>
-      <p:sp>
-        <p:nvSpPr>
-          <p:cNvPr id="19" name="Oval 18"/>
-          <p:cNvSpPr/>
-          <p:nvPr/>
-        </p:nvSpPr>
-        <p:spPr>
-          <a:xfrm>
-            <a:off x="6461607" y="4251960"/>
-            <a:ext cx="457200" cy="457200"/>
-          </a:xfrm>
-          <a:prstGeom prst="ellipse">
-            <a:avLst/>
-          </a:prstGeom>
-          <a:solidFill>
-            <a:srgbClr val="E0463A"/>
-          </a:solidFill>
-          <a:ln>
-            <a:noFill/>
-          </a:ln>
-          <a:effectLst/>
-        </p:spPr>
-        <p:style>
-          <a:lnRef idx="1">
-            <a:schemeClr val="accent1"/>
-          </a:lnRef>
-          <a:fillRef idx="3">
-            <a:schemeClr val="accent1"/>
-          </a:fillRef>
-          <a:effectRef idx="2">
-            <a:schemeClr val="accent1"/>
-          </a:effectRef>
-          <a:fontRef idx="minor">
-            <a:schemeClr val="lt1"/>
-          </a:fontRef>
-        </p:style>
-        <p:txBody>
-          <a:bodyPr rtlCol="0" anchor="ctr" lIns="0" rIns="0" tIns="0" bIns="0"/>
-          <a:lstStyle/>
-          <a:p>
-            <a:pPr algn="ctr"/>
-            <a:r>
-              <a:rPr sz="1500" b="1">
-                <a:solidFill>
-                  <a:srgbClr val="FFFFFF"/>
-                </a:solidFill>
-                <a:latin typeface="Calibri"/>
-              </a:rPr>
-              <a:t>4</a:t>
-            </a:r>
-          </a:p>
-        </p:txBody>
-      </p:sp>
-      <p:sp>
-        <p:nvSpPr>
-          <p:cNvPr id="20" name="TextBox 19"/>
-          <p:cNvSpPr txBox="1"/>
-          <p:nvPr/>
-        </p:nvSpPr>
-        <p:spPr>
-          <a:xfrm>
-            <a:off x="7055967" y="4224528"/>
-            <a:ext cx="4404207" cy="512064"/>
-          </a:xfrm>
-          <a:prstGeom prst="rect">
-            <a:avLst/>
-          </a:prstGeom>
-          <a:noFill/>
-        </p:spPr>
-        <p:txBody>
-          <a:bodyPr wrap="square" anchor="ctr" lIns="0" rIns="0" tIns="0" bIns="0"/>
-          <a:lstStyle/>
-          <a:p>
-            <a:pPr algn="l"/>
-            <a:r>
-              <a:rPr sz="1900" b="1" i="0">
-                <a:solidFill>
-                  <a:srgbClr val="03306E"/>
-                </a:solidFill>
-                <a:latin typeface="Calibri"/>
-              </a:rPr>
-              <a:t>Physical models</a:t>
-            </a:r>
-          </a:p>
-        </p:txBody>
-      </p:sp>
-      <p:sp>
-        <p:nvSpPr>
-          <p:cNvPr id="21" name="TextBox 20"/>
-          <p:cNvSpPr txBox="1"/>
-          <p:nvPr/>
-        </p:nvSpPr>
-        <p:spPr>
-          <a:xfrm>
-            <a:off x="6461607" y="4892040"/>
-            <a:ext cx="4952847" cy="1143000"/>
-          </a:xfrm>
-          <a:prstGeom prst="rect">
-            <a:avLst/>
-          </a:prstGeom>
-          <a:noFill/>
-        </p:spPr>
-        <p:txBody>
-          <a:bodyPr wrap="square" anchor="t" lIns="0" rIns="0" tIns="0" bIns="0"/>
-          <a:lstStyle/>
-          <a:p>
-            <a:pPr algn="l"/>
-            <a:r>
-              <a:rPr sz="2000" b="0" i="0">
-                <a:solidFill>
-                  <a:srgbClr val="202122"/>
-                </a:solidFill>
-                <a:latin typeface="Calibri"/>
-              </a:rPr>
-              <a:t>Check fit, form and function.</a:t>
+                <a:latin typeface="Cambria"/>
+              </a:rPr>
+              <a:t>Every 'small' change costs time and money. Log it before you act on it.</a:t>
             </a:r>
           </a:p>
         </p:txBody>
@@ -6765,7 +8687,7 @@
                 </a:solidFill>
                 <a:latin typeface="Cambria"/>
               </a:rPr>
-              <a:t>Check your understanding</a:t>
+              <a:t>Quick check: Scope creep and design change</a:t>
             </a:r>
           </a:p>
         </p:txBody>
@@ -6844,8 +8766,8 @@
         </p:nvSpPr>
         <p:spPr>
           <a:xfrm>
-            <a:off x="548640" y="1618488"/>
-            <a:ext cx="411480" cy="411480"/>
+            <a:off x="548640" y="1691640"/>
+            <a:ext cx="502920" cy="502920"/>
           </a:xfrm>
           <a:prstGeom prst="ellipse">
             <a:avLst/>
@@ -6878,7 +8800,7 @@
           <a:p>
             <a:pPr algn="ctr"/>
             <a:r>
-              <a:rPr sz="1400" b="1">
+              <a:rPr sz="1600" b="1">
                 <a:solidFill>
                   <a:srgbClr val="FFFFFF"/>
                 </a:solidFill>
@@ -6897,8 +8819,8 @@
         </p:nvSpPr>
         <p:spPr>
           <a:xfrm>
-            <a:off x="1234440" y="1600200"/>
-            <a:ext cx="10408615" cy="1429512"/>
+            <a:off x="1371600" y="1645920"/>
+            <a:ext cx="10271455" cy="1188720"/>
           </a:xfrm>
           <a:prstGeom prst="rect">
             <a:avLst/>
@@ -6911,7 +8833,7 @@
           <a:p>
             <a:pPr algn="l"/>
             <a:r>
-              <a:rPr sz="2200" b="0" i="0">
+              <a:rPr sz="2400" b="0" i="0">
                 <a:solidFill>
                   <a:srgbClr val="202122"/>
                 </a:solidFill>
@@ -6930,8 +8852,8 @@
         </p:nvSpPr>
         <p:spPr>
           <a:xfrm>
-            <a:off x="548640" y="3212592"/>
-            <a:ext cx="411480" cy="411480"/>
+            <a:off x="548640" y="3108960"/>
+            <a:ext cx="502920" cy="502920"/>
           </a:xfrm>
           <a:prstGeom prst="ellipse">
             <a:avLst/>
@@ -6964,7 +8886,7 @@
           <a:p>
             <a:pPr algn="ctr"/>
             <a:r>
-              <a:rPr sz="1400" b="1">
+              <a:rPr sz="1600" b="1">
                 <a:solidFill>
                   <a:srgbClr val="FFFFFF"/>
                 </a:solidFill>
@@ -6983,8 +8905,8 @@
         </p:nvSpPr>
         <p:spPr>
           <a:xfrm>
-            <a:off x="1234440" y="3194304"/>
-            <a:ext cx="10408615" cy="1429512"/>
+            <a:off x="1371600" y="3063240"/>
+            <a:ext cx="10271455" cy="1188720"/>
           </a:xfrm>
           <a:prstGeom prst="rect">
             <a:avLst/>
@@ -6997,13 +8919,13 @@
           <a:p>
             <a:pPr algn="l"/>
             <a:r>
-              <a:rPr sz="2200" b="0" i="0">
+              <a:rPr sz="2400" b="0" i="0">
                 <a:solidFill>
                   <a:srgbClr val="202122"/>
                 </a:solidFill>
                 <a:latin typeface="Calibri"/>
               </a:rPr>
-              <a:t>Give two formats of engineering information.</a:t>
+              <a:t>What is process-driven change?</a:t>
             </a:r>
           </a:p>
         </p:txBody>
@@ -7016,8 +8938,8 @@
         </p:nvSpPr>
         <p:spPr>
           <a:xfrm>
-            <a:off x="548640" y="4806695"/>
-            <a:ext cx="411480" cy="411480"/>
+            <a:off x="548640" y="4526280"/>
+            <a:ext cx="502920" cy="502920"/>
           </a:xfrm>
           <a:prstGeom prst="ellipse">
             <a:avLst/>
@@ -7050,7 +8972,7 @@
           <a:p>
             <a:pPr algn="ctr"/>
             <a:r>
-              <a:rPr sz="1400" b="1">
+              <a:rPr sz="1600" b="1">
                 <a:solidFill>
                   <a:srgbClr val="FFFFFF"/>
                 </a:solidFill>
@@ -7069,8 +8991,8 @@
         </p:nvSpPr>
         <p:spPr>
           <a:xfrm>
-            <a:off x="1234440" y="4788408"/>
-            <a:ext cx="10408615" cy="1429512"/>
+            <a:off x="1371600" y="4480560"/>
+            <a:ext cx="10271455" cy="1188720"/>
           </a:xfrm>
           <a:prstGeom prst="rect">
             <a:avLst/>
@@ -7083,13 +9005,46 @@
           <a:p>
             <a:pPr algn="l"/>
             <a:r>
-              <a:rPr sz="2200" b="0" i="0">
+              <a:rPr sz="2400" b="0" i="0">
                 <a:solidFill>
                   <a:srgbClr val="202122"/>
                 </a:solidFill>
                 <a:latin typeface="Calibri"/>
               </a:rPr>
-              <a:t>Why verify a design with calculations as well as CAD?</a:t>
+              <a:t>What should happen to every change?</a:t>
+            </a:r>
+          </a:p>
+        </p:txBody>
+      </p:sp>
+      <p:sp>
+        <p:nvSpPr>
+          <p:cNvPr id="12" name="TextBox 11"/>
+          <p:cNvSpPr txBox="1"/>
+          <p:nvPr/>
+        </p:nvSpPr>
+        <p:spPr>
+          <a:xfrm>
+            <a:off x="548640" y="5852160"/>
+            <a:ext cx="11094415" cy="365760"/>
+          </a:xfrm>
+          <a:prstGeom prst="rect">
+            <a:avLst/>
+          </a:prstGeom>
+          <a:noFill/>
+        </p:spPr>
+        <p:txBody>
+          <a:bodyPr wrap="square" anchor="t" lIns="0" rIns="0" tIns="0" bIns="0"/>
+          <a:lstStyle/>
+          <a:p>
+            <a:pPr algn="l"/>
+            <a:r>
+              <a:rPr sz="1300" b="0" i="1">
+                <a:solidFill>
+                  <a:srgbClr val="54595D"/>
+                </a:solidFill>
+                <a:latin typeface="Calibri"/>
+              </a:rPr>
+              <a:t>Answer on mini whiteboards or in your book. Answers are in the speaker notes.</a:t>
             </a:r>
           </a:p>
         </p:txBody>
@@ -7181,7 +9136,7 @@
                 </a:solidFill>
                 <a:latin typeface="Cambria"/>
               </a:rPr>
-              <a:t>Answers</a:t>
+              <a:t>Verifying design information</a:t>
             </a:r>
           </a:p>
         </p:txBody>
@@ -7254,14 +9209,138 @@
       </p:sp>
       <p:sp>
         <p:nvSpPr>
-          <p:cNvPr id="6" name="Oval 5"/>
+          <p:cNvPr id="6" name="TextBox 5"/>
+          <p:cNvSpPr txBox="1"/>
+          <p:nvPr/>
+        </p:nvSpPr>
+        <p:spPr>
+          <a:xfrm>
+            <a:off x="548640" y="1554480"/>
+            <a:ext cx="6720840" cy="4617720"/>
+          </a:xfrm>
+          <a:prstGeom prst="rect">
+            <a:avLst/>
+          </a:prstGeom>
+          <a:noFill/>
+        </p:spPr>
+        <p:txBody>
+          <a:bodyPr wrap="square" lIns="0" rIns="0" tIns="0" bIns="0">
+            <a:spAutoFit/>
+          </a:bodyPr>
+          <a:lstStyle/>
+          <a:p>
+            <a:pPr>
+              <a:spcAft>
+                <a:spcPts val="1320"/>
+              </a:spcAft>
+            </a:pPr>
+            <a:r>
+              <a:rPr sz="2200" b="0">
+                <a:solidFill>
+                  <a:srgbClr val="202122"/>
+                </a:solidFill>
+                <a:latin typeface="Calibri"/>
+              </a:rPr>
+              <a:t>Before a design goes further, check it actually meets the requirements: the components, materials, application, location, risks and environment.</a:t>
+            </a:r>
+          </a:p>
+          <a:p>
+            <a:pPr>
+              <a:spcAft>
+                <a:spcPts val="1320"/>
+              </a:spcAft>
+            </a:pPr>
+            <a:r>
+              <a:rPr sz="2200" b="1">
+                <a:solidFill>
+                  <a:srgbClr val="202122"/>
+                </a:solidFill>
+                <a:latin typeface="Calibri"/>
+              </a:rPr>
+              <a:t>Use technology to evaluate it:</a:t>
+            </a:r>
+            <a:r>
+              <a:rPr sz="2200" b="0">
+                <a:solidFill>
+                  <a:srgbClr val="202122"/>
+                </a:solidFill>
+                <a:latin typeface="Calibri"/>
+              </a:rPr>
+              <a:t> mathematical calculations to check loads and stresses, CAD simulations to test the design virtually, and physical models to check fit, form and function.</a:t>
+            </a:r>
+          </a:p>
+          <a:p>
+            <a:pPr>
+              <a:spcAft>
+                <a:spcPts val="1320"/>
+              </a:spcAft>
+            </a:pPr>
+            <a:r>
+              <a:rPr sz="2200" b="0">
+                <a:solidFill>
+                  <a:srgbClr val="202122"/>
+                </a:solidFill>
+                <a:latin typeface="Calibri"/>
+              </a:rPr>
+              <a:t>Using more than one method gives confidence, because each can catch mistakes the others miss.</a:t>
+            </a:r>
+          </a:p>
+        </p:txBody>
+      </p:sp>
+      <p:sp>
+        <p:nvSpPr>
+          <p:cNvPr id="7" name="Rounded Rectangle 6"/>
           <p:cNvSpPr/>
           <p:nvPr/>
         </p:nvSpPr>
         <p:spPr>
           <a:xfrm>
-            <a:off x="548640" y="1618488"/>
-            <a:ext cx="411480" cy="411480"/>
+            <a:off x="7772400" y="1554480"/>
+            <a:ext cx="3867912" cy="4526280"/>
+          </a:xfrm>
+          <a:prstGeom prst="roundRect">
+            <a:avLst>
+              <a:gd name="adj" fmla="val 8000"/>
+            </a:avLst>
+          </a:prstGeom>
+          <a:solidFill>
+            <a:srgbClr val="03306E"/>
+          </a:solidFill>
+          <a:ln>
+            <a:noFill/>
+          </a:ln>
+          <a:effectLst/>
+        </p:spPr>
+        <p:style>
+          <a:lnRef idx="1">
+            <a:schemeClr val="accent1"/>
+          </a:lnRef>
+          <a:fillRef idx="3">
+            <a:schemeClr val="accent1"/>
+          </a:fillRef>
+          <a:effectRef idx="2">
+            <a:schemeClr val="accent1"/>
+          </a:effectRef>
+          <a:fontRef idx="minor">
+            <a:schemeClr val="lt1"/>
+          </a:fontRef>
+        </p:style>
+        <p:txBody>
+          <a:bodyPr rtlCol="0" anchor="ctr"/>
+          <a:lstStyle/>
+          <a:p/>
+        </p:txBody>
+      </p:sp>
+      <p:sp>
+        <p:nvSpPr>
+          <p:cNvPr id="8" name="Oval 7"/>
+          <p:cNvSpPr/>
+          <p:nvPr/>
+        </p:nvSpPr>
+        <p:spPr>
+          <a:xfrm>
+            <a:off x="8046720" y="1828800"/>
+            <a:ext cx="548640" cy="548640"/>
           </a:xfrm>
           <a:prstGeom prst="ellipse">
             <a:avLst/>
@@ -7294,110 +9373,13 @@
           <a:p>
             <a:pPr algn="ctr"/>
             <a:r>
-              <a:rPr sz="1400" b="1">
+              <a:rPr sz="1300" b="1">
                 <a:solidFill>
                   <a:srgbClr val="FFFFFF"/>
                 </a:solidFill>
                 <a:latin typeface="Calibri"/>
               </a:rPr>
-              <a:t>1</a:t>
-            </a:r>
-          </a:p>
-        </p:txBody>
-      </p:sp>
-      <p:sp>
-        <p:nvSpPr>
-          <p:cNvPr id="7" name="TextBox 6"/>
-          <p:cNvSpPr txBox="1"/>
-          <p:nvPr/>
-        </p:nvSpPr>
-        <p:spPr>
-          <a:xfrm>
-            <a:off x="1234440" y="1600200"/>
-            <a:ext cx="10408615" cy="1429512"/>
-          </a:xfrm>
-          <a:prstGeom prst="rect">
-            <a:avLst/>
-          </a:prstGeom>
-          <a:noFill/>
-        </p:spPr>
-        <p:txBody>
-          <a:bodyPr wrap="square" anchor="t" lIns="0" rIns="0" tIns="0" bIns="0"/>
-          <a:lstStyle/>
-          <a:p>
-            <a:pPr algn="l"/>
-            <a:r>
-              <a:rPr sz="1800" b="0" i="0">
-                <a:solidFill>
-                  <a:srgbClr val="54595D"/>
-                </a:solidFill>
-                <a:latin typeface="Calibri"/>
-              </a:rPr>
-              <a:t>What is scope creep?</a:t>
-            </a:r>
-          </a:p>
-          <a:p>
-            <a:r>
-              <a:rPr sz="1800" b="1">
-                <a:solidFill>
-                  <a:srgbClr val="03306E"/>
-                </a:solidFill>
-                <a:latin typeface="Calibri"/>
-              </a:rPr>
-              <a:t>Uncontrolled growth in project requirements.</a:t>
-            </a:r>
-          </a:p>
-        </p:txBody>
-      </p:sp>
-      <p:sp>
-        <p:nvSpPr>
-          <p:cNvPr id="8" name="Oval 7"/>
-          <p:cNvSpPr/>
-          <p:nvPr/>
-        </p:nvSpPr>
-        <p:spPr>
-          <a:xfrm>
-            <a:off x="548640" y="3212592"/>
-            <a:ext cx="411480" cy="411480"/>
-          </a:xfrm>
-          <a:prstGeom prst="ellipse">
-            <a:avLst/>
-          </a:prstGeom>
-          <a:solidFill>
-            <a:srgbClr val="E0463A"/>
-          </a:solidFill>
-          <a:ln>
-            <a:noFill/>
-          </a:ln>
-          <a:effectLst/>
-        </p:spPr>
-        <p:style>
-          <a:lnRef idx="1">
-            <a:schemeClr val="accent1"/>
-          </a:lnRef>
-          <a:fillRef idx="3">
-            <a:schemeClr val="accent1"/>
-          </a:fillRef>
-          <a:effectRef idx="2">
-            <a:schemeClr val="accent1"/>
-          </a:effectRef>
-          <a:fontRef idx="minor">
-            <a:schemeClr val="lt1"/>
-          </a:fontRef>
-        </p:style>
-        <p:txBody>
-          <a:bodyPr rtlCol="0" anchor="ctr" lIns="0" rIns="0" tIns="0" bIns="0"/>
-          <a:lstStyle/>
-          <a:p>
-            <a:pPr algn="ctr"/>
-            <a:r>
-              <a:rPr sz="1400" b="1">
-                <a:solidFill>
-                  <a:srgbClr val="FFFFFF"/>
-                </a:solidFill>
-                <a:latin typeface="Calibri"/>
-              </a:rPr>
-              <a:t>2</a:t>
+              <a:t>e.g.</a:t>
             </a:r>
           </a:p>
         </p:txBody>
@@ -7410,8 +9392,8 @@
         </p:nvSpPr>
         <p:spPr>
           <a:xfrm>
-            <a:off x="1234440" y="3194304"/>
-            <a:ext cx="10408615" cy="1429512"/>
+            <a:off x="8046720" y="2560320"/>
+            <a:ext cx="3291840" cy="365760"/>
           </a:xfrm>
           <a:prstGeom prst="rect">
             <a:avLst/>
@@ -7424,121 +9406,46 @@
           <a:p>
             <a:pPr algn="l"/>
             <a:r>
-              <a:rPr sz="1800" b="0" i="0">
-                <a:solidFill>
-                  <a:srgbClr val="54595D"/>
-                </a:solidFill>
-                <a:latin typeface="Calibri"/>
-              </a:rPr>
-              <a:t>Give two formats of engineering information.</a:t>
-            </a:r>
-          </a:p>
-          <a:p>
-            <a:r>
-              <a:rPr sz="1800" b="1">
-                <a:solidFill>
-                  <a:srgbClr val="03306E"/>
-                </a:solidFill>
-                <a:latin typeface="Calibri"/>
-              </a:rPr>
-              <a:t>Any two, e.g. specifications, CAD models, drawings, SOPs.</a:t>
-            </a:r>
-          </a:p>
-        </p:txBody>
-      </p:sp>
-      <p:sp>
-        <p:nvSpPr>
-          <p:cNvPr id="10" name="Oval 9"/>
-          <p:cNvSpPr/>
-          <p:nvPr/>
-        </p:nvSpPr>
-        <p:spPr>
-          <a:xfrm>
-            <a:off x="548640" y="4806695"/>
-            <a:ext cx="411480" cy="411480"/>
-          </a:xfrm>
-          <a:prstGeom prst="ellipse">
-            <a:avLst/>
-          </a:prstGeom>
-          <a:solidFill>
-            <a:srgbClr val="E0463A"/>
-          </a:solidFill>
-          <a:ln>
-            <a:noFill/>
-          </a:ln>
-          <a:effectLst/>
-        </p:spPr>
-        <p:style>
-          <a:lnRef idx="1">
-            <a:schemeClr val="accent1"/>
-          </a:lnRef>
-          <a:fillRef idx="3">
-            <a:schemeClr val="accent1"/>
-          </a:fillRef>
-          <a:effectRef idx="2">
-            <a:schemeClr val="accent1"/>
-          </a:effectRef>
-          <a:fontRef idx="minor">
-            <a:schemeClr val="lt1"/>
-          </a:fontRef>
-        </p:style>
-        <p:txBody>
-          <a:bodyPr rtlCol="0" anchor="ctr" lIns="0" rIns="0" tIns="0" bIns="0"/>
-          <a:lstStyle/>
-          <a:p>
-            <a:pPr algn="ctr"/>
-            <a:r>
-              <a:rPr sz="1400" b="1">
+              <a:rPr sz="1300" b="1" i="0">
+                <a:solidFill>
+                  <a:srgbClr val="A9C8F0"/>
+                </a:solidFill>
+                <a:latin typeface="Calibri"/>
+              </a:rPr>
+              <a:t>EXAMPLE</a:t>
+            </a:r>
+          </a:p>
+        </p:txBody>
+      </p:sp>
+      <p:sp>
+        <p:nvSpPr>
+          <p:cNvPr id="10" name="TextBox 9"/>
+          <p:cNvSpPr txBox="1"/>
+          <p:nvPr/>
+        </p:nvSpPr>
+        <p:spPr>
+          <a:xfrm>
+            <a:off x="8046720" y="2971800"/>
+            <a:ext cx="3291840" cy="2971800"/>
+          </a:xfrm>
+          <a:prstGeom prst="rect">
+            <a:avLst/>
+          </a:prstGeom>
+          <a:noFill/>
+        </p:spPr>
+        <p:txBody>
+          <a:bodyPr wrap="square" anchor="t" lIns="0" rIns="0" tIns="0" bIns="0"/>
+          <a:lstStyle/>
+          <a:p>
+            <a:pPr algn="l"/>
+            <a:r>
+              <a:rPr sz="1900" b="0" i="0">
                 <a:solidFill>
                   <a:srgbClr val="FFFFFF"/>
                 </a:solidFill>
-                <a:latin typeface="Calibri"/>
-              </a:rPr>
-              <a:t>3</a:t>
-            </a:r>
-          </a:p>
-        </p:txBody>
-      </p:sp>
-      <p:sp>
-        <p:nvSpPr>
-          <p:cNvPr id="11" name="TextBox 10"/>
-          <p:cNvSpPr txBox="1"/>
-          <p:nvPr/>
-        </p:nvSpPr>
-        <p:spPr>
-          <a:xfrm>
-            <a:off x="1234440" y="4788408"/>
-            <a:ext cx="10408615" cy="1429512"/>
-          </a:xfrm>
-          <a:prstGeom prst="rect">
-            <a:avLst/>
-          </a:prstGeom>
-          <a:noFill/>
-        </p:spPr>
-        <p:txBody>
-          <a:bodyPr wrap="square" anchor="t" lIns="0" rIns="0" tIns="0" bIns="0"/>
-          <a:lstStyle/>
-          <a:p>
-            <a:pPr algn="l"/>
-            <a:r>
-              <a:rPr sz="1800" b="0" i="0">
-                <a:solidFill>
-                  <a:srgbClr val="54595D"/>
-                </a:solidFill>
-                <a:latin typeface="Calibri"/>
-              </a:rPr>
-              <a:t>Why verify a design with calculations as well as CAD?</a:t>
-            </a:r>
-          </a:p>
-          <a:p>
-            <a:r>
-              <a:rPr sz="1800" b="1">
-                <a:solidFill>
-                  <a:srgbClr val="03306E"/>
-                </a:solidFill>
-                <a:latin typeface="Calibri"/>
-              </a:rPr>
-              <a:t>To check the simulation and confirm results independently.</a:t>
+                <a:latin typeface="Cambria"/>
+              </a:rPr>
+              <a:t>A CAD stress simulation shows a bracket is safe, but a hand calculation disagrees by a factor of ten: the load had been entered in the wrong units.</a:t>
             </a:r>
           </a:p>
         </p:txBody>
@@ -7630,7 +9537,7 @@
                 </a:solidFill>
                 <a:latin typeface="Cambria"/>
               </a:rPr>
-              <a:t>Activity: Spot the errors</a:t>
+              <a:t>Verifying design information</a:t>
             </a:r>
           </a:p>
         </p:txBody>
@@ -7709,13 +9616,55 @@
         </p:nvSpPr>
         <p:spPr>
           <a:xfrm>
-            <a:off x="548640" y="1508760"/>
-            <a:ext cx="2011680" cy="457200"/>
+            <a:off x="548640" y="1600200"/>
+            <a:ext cx="5410047" cy="2148840"/>
           </a:xfrm>
           <a:prstGeom prst="roundRect">
             <a:avLst>
-              <a:gd name="adj" fmla="val 50000"/>
+              <a:gd name="adj" fmla="val 6000"/>
             </a:avLst>
+          </a:prstGeom>
+          <a:solidFill>
+            <a:srgbClr val="EAF3FF"/>
+          </a:solidFill>
+          <a:ln>
+            <a:noFill/>
+          </a:ln>
+          <a:effectLst/>
+        </p:spPr>
+        <p:style>
+          <a:lnRef idx="1">
+            <a:schemeClr val="accent1"/>
+          </a:lnRef>
+          <a:fillRef idx="3">
+            <a:schemeClr val="accent1"/>
+          </a:fillRef>
+          <a:effectRef idx="2">
+            <a:schemeClr val="accent1"/>
+          </a:effectRef>
+          <a:fontRef idx="minor">
+            <a:schemeClr val="lt1"/>
+          </a:fontRef>
+        </p:style>
+        <p:txBody>
+          <a:bodyPr rtlCol="0" anchor="ctr"/>
+          <a:lstStyle/>
+          <a:p/>
+        </p:txBody>
+      </p:sp>
+      <p:sp>
+        <p:nvSpPr>
+          <p:cNvPr id="7" name="Oval 6"/>
+          <p:cNvSpPr/>
+          <p:nvPr/>
+        </p:nvSpPr>
+        <p:spPr>
+          <a:xfrm>
+            <a:off x="777240" y="1828800"/>
+            <a:ext cx="457200" cy="457200"/>
+          </a:xfrm>
+          <a:prstGeom prst="ellipse">
+            <a:avLst/>
           </a:prstGeom>
           <a:solidFill>
             <a:srgbClr val="E0463A"/>
@@ -7740,40 +9689,18 @@
           </a:fontRef>
         </p:style>
         <p:txBody>
-          <a:bodyPr rtlCol="0" anchor="ctr"/>
-          <a:lstStyle/>
-          <a:p/>
-        </p:txBody>
-      </p:sp>
-      <p:sp>
-        <p:nvSpPr>
-          <p:cNvPr id="7" name="TextBox 6"/>
-          <p:cNvSpPr txBox="1"/>
-          <p:nvPr/>
-        </p:nvSpPr>
-        <p:spPr>
-          <a:xfrm>
-            <a:off x="548640" y="1508760"/>
-            <a:ext cx="2011680" cy="457200"/>
-          </a:xfrm>
-          <a:prstGeom prst="rect">
-            <a:avLst/>
-          </a:prstGeom>
-          <a:noFill/>
-        </p:spPr>
-        <p:txBody>
-          <a:bodyPr wrap="square" anchor="ctr" lIns="0" rIns="0" tIns="0" bIns="0"/>
+          <a:bodyPr rtlCol="0" anchor="ctr" lIns="0" rIns="0" tIns="0" bIns="0"/>
           <a:lstStyle/>
           <a:p>
             <a:pPr algn="ctr"/>
             <a:r>
-              <a:rPr sz="1400" b="1" i="0">
+              <a:rPr sz="1500" b="1">
                 <a:solidFill>
                   <a:srgbClr val="FFFFFF"/>
                 </a:solidFill>
                 <a:latin typeface="Calibri"/>
               </a:rPr>
-              <a:t>25 minutes</a:t>
+              <a:t>1</a:t>
             </a:r>
           </a:p>
         </p:txBody>
@@ -7786,8 +9713,8 @@
         </p:nvSpPr>
         <p:spPr>
           <a:xfrm>
-            <a:off x="2743200" y="1508760"/>
-            <a:ext cx="4754880" cy="457200"/>
+            <a:off x="1371600" y="1801368"/>
+            <a:ext cx="4404207" cy="512064"/>
           </a:xfrm>
           <a:prstGeom prst="rect">
             <a:avLst/>
@@ -7800,375 +9727,64 @@
           <a:p>
             <a:pPr algn="l"/>
             <a:r>
-              <a:rPr sz="1400" b="0" i="1">
-                <a:solidFill>
-                  <a:srgbClr val="54595D"/>
-                </a:solidFill>
-                <a:latin typeface="Calibri"/>
-              </a:rPr>
-              <a:t>Pairs</a:t>
-            </a:r>
-          </a:p>
-        </p:txBody>
-      </p:sp>
-      <p:sp>
-        <p:nvSpPr>
-          <p:cNvPr id="9" name="Oval 8"/>
+              <a:rPr sz="1900" b="1" i="0">
+                <a:solidFill>
+                  <a:srgbClr val="03306E"/>
+                </a:solidFill>
+                <a:latin typeface="Calibri"/>
+              </a:rPr>
+              <a:t>Against requirements</a:t>
+            </a:r>
+          </a:p>
+        </p:txBody>
+      </p:sp>
+      <p:sp>
+        <p:nvSpPr>
+          <p:cNvPr id="9" name="TextBox 8"/>
+          <p:cNvSpPr txBox="1"/>
+          <p:nvPr/>
+        </p:nvSpPr>
+        <p:spPr>
+          <a:xfrm>
+            <a:off x="777240" y="2468880"/>
+            <a:ext cx="4952847" cy="1143000"/>
+          </a:xfrm>
+          <a:prstGeom prst="rect">
+            <a:avLst/>
+          </a:prstGeom>
+          <a:noFill/>
+        </p:spPr>
+        <p:txBody>
+          <a:bodyPr wrap="square" anchor="t" lIns="0" rIns="0" tIns="0" bIns="0"/>
+          <a:lstStyle/>
+          <a:p>
+            <a:pPr algn="l"/>
+            <a:r>
+              <a:rPr sz="2000" b="0" i="0">
+                <a:solidFill>
+                  <a:srgbClr val="202122"/>
+                </a:solidFill>
+                <a:latin typeface="Calibri"/>
+              </a:rPr>
+              <a:t>Components, materials, application, location, risk, environment.</a:t>
+            </a:r>
+          </a:p>
+        </p:txBody>
+      </p:sp>
+      <p:sp>
+        <p:nvSpPr>
+          <p:cNvPr id="10" name="Rounded Rectangle 9"/>
           <p:cNvSpPr/>
           <p:nvPr/>
         </p:nvSpPr>
         <p:spPr>
           <a:xfrm>
-            <a:off x="548640" y="2482596"/>
-            <a:ext cx="384048" cy="384048"/>
-          </a:xfrm>
-          <a:prstGeom prst="ellipse">
-            <a:avLst/>
-          </a:prstGeom>
-          <a:solidFill>
-            <a:srgbClr val="0645AD"/>
-          </a:solidFill>
-          <a:ln>
-            <a:noFill/>
-          </a:ln>
-          <a:effectLst/>
-        </p:spPr>
-        <p:style>
-          <a:lnRef idx="1">
-            <a:schemeClr val="accent1"/>
-          </a:lnRef>
-          <a:fillRef idx="3">
-            <a:schemeClr val="accent1"/>
-          </a:fillRef>
-          <a:effectRef idx="2">
-            <a:schemeClr val="accent1"/>
-          </a:effectRef>
-          <a:fontRef idx="minor">
-            <a:schemeClr val="lt1"/>
-          </a:fontRef>
-        </p:style>
-        <p:txBody>
-          <a:bodyPr rtlCol="0" anchor="ctr" lIns="0" rIns="0" tIns="0" bIns="0"/>
-          <a:lstStyle/>
-          <a:p>
-            <a:pPr algn="ctr"/>
-            <a:r>
-              <a:rPr sz="1300" b="1">
-                <a:solidFill>
-                  <a:srgbClr val="FFFFFF"/>
-                </a:solidFill>
-                <a:latin typeface="Calibri"/>
-              </a:rPr>
-              <a:t>1</a:t>
-            </a:r>
-          </a:p>
-        </p:txBody>
-      </p:sp>
-      <p:sp>
-        <p:nvSpPr>
-          <p:cNvPr id="10" name="TextBox 9"/>
-          <p:cNvSpPr txBox="1"/>
-          <p:nvPr/>
-        </p:nvSpPr>
-        <p:spPr>
-          <a:xfrm>
-            <a:off x="1143000" y="2240280"/>
-            <a:ext cx="5943600" cy="868680"/>
-          </a:xfrm>
-          <a:prstGeom prst="rect">
-            <a:avLst/>
-          </a:prstGeom>
-          <a:noFill/>
-        </p:spPr>
-        <p:txBody>
-          <a:bodyPr wrap="square" anchor="ctr" lIns="0" rIns="0" tIns="0" bIns="0"/>
-          <a:lstStyle/>
-          <a:p>
-            <a:pPr algn="l"/>
-            <a:r>
-              <a:rPr sz="1700" b="0" i="0">
-                <a:solidFill>
-                  <a:srgbClr val="202122"/>
-                </a:solidFill>
-                <a:latin typeface="Calibri"/>
-              </a:rPr>
-              <a:t>Review the drawing and specification pack from your teacher.</a:t>
-            </a:r>
-          </a:p>
-        </p:txBody>
-      </p:sp>
-      <p:sp>
-        <p:nvSpPr>
-          <p:cNvPr id="11" name="Oval 10"/>
-          <p:cNvSpPr/>
-          <p:nvPr/>
-        </p:nvSpPr>
-        <p:spPr>
-          <a:xfrm>
-            <a:off x="548640" y="3461004"/>
-            <a:ext cx="384048" cy="384048"/>
-          </a:xfrm>
-          <a:prstGeom prst="ellipse">
-            <a:avLst/>
-          </a:prstGeom>
-          <a:solidFill>
-            <a:srgbClr val="0645AD"/>
-          </a:solidFill>
-          <a:ln>
-            <a:noFill/>
-          </a:ln>
-          <a:effectLst/>
-        </p:spPr>
-        <p:style>
-          <a:lnRef idx="1">
-            <a:schemeClr val="accent1"/>
-          </a:lnRef>
-          <a:fillRef idx="3">
-            <a:schemeClr val="accent1"/>
-          </a:fillRef>
-          <a:effectRef idx="2">
-            <a:schemeClr val="accent1"/>
-          </a:effectRef>
-          <a:fontRef idx="minor">
-            <a:schemeClr val="lt1"/>
-          </a:fontRef>
-        </p:style>
-        <p:txBody>
-          <a:bodyPr rtlCol="0" anchor="ctr" lIns="0" rIns="0" tIns="0" bIns="0"/>
-          <a:lstStyle/>
-          <a:p>
-            <a:pPr algn="ctr"/>
-            <a:r>
-              <a:rPr sz="1300" b="1">
-                <a:solidFill>
-                  <a:srgbClr val="FFFFFF"/>
-                </a:solidFill>
-                <a:latin typeface="Calibri"/>
-              </a:rPr>
-              <a:t>2</a:t>
-            </a:r>
-          </a:p>
-        </p:txBody>
-      </p:sp>
-      <p:sp>
-        <p:nvSpPr>
-          <p:cNvPr id="12" name="TextBox 11"/>
-          <p:cNvSpPr txBox="1"/>
-          <p:nvPr/>
-        </p:nvSpPr>
-        <p:spPr>
-          <a:xfrm>
-            <a:off x="1143000" y="3218688"/>
-            <a:ext cx="5943600" cy="868680"/>
-          </a:xfrm>
-          <a:prstGeom prst="rect">
-            <a:avLst/>
-          </a:prstGeom>
-          <a:noFill/>
-        </p:spPr>
-        <p:txBody>
-          <a:bodyPr wrap="square" anchor="ctr" lIns="0" rIns="0" tIns="0" bIns="0"/>
-          <a:lstStyle/>
-          <a:p>
-            <a:pPr algn="l"/>
-            <a:r>
-              <a:rPr sz="1700" b="0" i="0">
-                <a:solidFill>
-                  <a:srgbClr val="202122"/>
-                </a:solidFill>
-                <a:latin typeface="Calibri"/>
-              </a:rPr>
-              <a:t>Find at least four errors or inconsistencies.</a:t>
-            </a:r>
-          </a:p>
-        </p:txBody>
-      </p:sp>
-      <p:sp>
-        <p:nvSpPr>
-          <p:cNvPr id="13" name="Oval 12"/>
-          <p:cNvSpPr/>
-          <p:nvPr/>
-        </p:nvSpPr>
-        <p:spPr>
-          <a:xfrm>
-            <a:off x="548640" y="4439412"/>
-            <a:ext cx="384048" cy="384048"/>
-          </a:xfrm>
-          <a:prstGeom prst="ellipse">
-            <a:avLst/>
-          </a:prstGeom>
-          <a:solidFill>
-            <a:srgbClr val="0645AD"/>
-          </a:solidFill>
-          <a:ln>
-            <a:noFill/>
-          </a:ln>
-          <a:effectLst/>
-        </p:spPr>
-        <p:style>
-          <a:lnRef idx="1">
-            <a:schemeClr val="accent1"/>
-          </a:lnRef>
-          <a:fillRef idx="3">
-            <a:schemeClr val="accent1"/>
-          </a:fillRef>
-          <a:effectRef idx="2">
-            <a:schemeClr val="accent1"/>
-          </a:effectRef>
-          <a:fontRef idx="minor">
-            <a:schemeClr val="lt1"/>
-          </a:fontRef>
-        </p:style>
-        <p:txBody>
-          <a:bodyPr rtlCol="0" anchor="ctr" lIns="0" rIns="0" tIns="0" bIns="0"/>
-          <a:lstStyle/>
-          <a:p>
-            <a:pPr algn="ctr"/>
-            <a:r>
-              <a:rPr sz="1300" b="1">
-                <a:solidFill>
-                  <a:srgbClr val="FFFFFF"/>
-                </a:solidFill>
-                <a:latin typeface="Calibri"/>
-              </a:rPr>
-              <a:t>3</a:t>
-            </a:r>
-          </a:p>
-        </p:txBody>
-      </p:sp>
-      <p:sp>
-        <p:nvSpPr>
-          <p:cNvPr id="14" name="TextBox 13"/>
-          <p:cNvSpPr txBox="1"/>
-          <p:nvPr/>
-        </p:nvSpPr>
-        <p:spPr>
-          <a:xfrm>
-            <a:off x="1143000" y="4197096"/>
-            <a:ext cx="5943600" cy="868680"/>
-          </a:xfrm>
-          <a:prstGeom prst="rect">
-            <a:avLst/>
-          </a:prstGeom>
-          <a:noFill/>
-        </p:spPr>
-        <p:txBody>
-          <a:bodyPr wrap="square" anchor="ctr" lIns="0" rIns="0" tIns="0" bIns="0"/>
-          <a:lstStyle/>
-          <a:p>
-            <a:pPr algn="l"/>
-            <a:r>
-              <a:rPr sz="1700" b="0" i="0">
-                <a:solidFill>
-                  <a:srgbClr val="202122"/>
-                </a:solidFill>
-                <a:latin typeface="Calibri"/>
-              </a:rPr>
-              <a:t>Correct each one.</a:t>
-            </a:r>
-          </a:p>
-        </p:txBody>
-      </p:sp>
-      <p:sp>
-        <p:nvSpPr>
-          <p:cNvPr id="15" name="Oval 14"/>
-          <p:cNvSpPr/>
-          <p:nvPr/>
-        </p:nvSpPr>
-        <p:spPr>
-          <a:xfrm>
-            <a:off x="548640" y="5417820"/>
-            <a:ext cx="384048" cy="384048"/>
-          </a:xfrm>
-          <a:prstGeom prst="ellipse">
-            <a:avLst/>
-          </a:prstGeom>
-          <a:solidFill>
-            <a:srgbClr val="0645AD"/>
-          </a:solidFill>
-          <a:ln>
-            <a:noFill/>
-          </a:ln>
-          <a:effectLst/>
-        </p:spPr>
-        <p:style>
-          <a:lnRef idx="1">
-            <a:schemeClr val="accent1"/>
-          </a:lnRef>
-          <a:fillRef idx="3">
-            <a:schemeClr val="accent1"/>
-          </a:fillRef>
-          <a:effectRef idx="2">
-            <a:schemeClr val="accent1"/>
-          </a:effectRef>
-          <a:fontRef idx="minor">
-            <a:schemeClr val="lt1"/>
-          </a:fontRef>
-        </p:style>
-        <p:txBody>
-          <a:bodyPr rtlCol="0" anchor="ctr" lIns="0" rIns="0" tIns="0" bIns="0"/>
-          <a:lstStyle/>
-          <a:p>
-            <a:pPr algn="ctr"/>
-            <a:r>
-              <a:rPr sz="1300" b="1">
-                <a:solidFill>
-                  <a:srgbClr val="FFFFFF"/>
-                </a:solidFill>
-                <a:latin typeface="Calibri"/>
-              </a:rPr>
-              <a:t>4</a:t>
-            </a:r>
-          </a:p>
-        </p:txBody>
-      </p:sp>
-      <p:sp>
-        <p:nvSpPr>
-          <p:cNvPr id="16" name="TextBox 15"/>
-          <p:cNvSpPr txBox="1"/>
-          <p:nvPr/>
-        </p:nvSpPr>
-        <p:spPr>
-          <a:xfrm>
-            <a:off x="1143000" y="5175504"/>
-            <a:ext cx="5943600" cy="868680"/>
-          </a:xfrm>
-          <a:prstGeom prst="rect">
-            <a:avLst/>
-          </a:prstGeom>
-          <a:noFill/>
-        </p:spPr>
-        <p:txBody>
-          <a:bodyPr wrap="square" anchor="ctr" lIns="0" rIns="0" tIns="0" bIns="0"/>
-          <a:lstStyle/>
-          <a:p>
-            <a:pPr algn="l"/>
-            <a:r>
-              <a:rPr sz="1700" b="0" i="0">
-                <a:solidFill>
-                  <a:srgbClr val="202122"/>
-                </a:solidFill>
-                <a:latin typeface="Calibri"/>
-              </a:rPr>
-              <a:t>Decide which ones need escalating and to whom.</a:t>
-            </a:r>
-          </a:p>
-        </p:txBody>
-      </p:sp>
-      <p:sp>
-        <p:nvSpPr>
-          <p:cNvPr id="17" name="Rounded Rectangle 16"/>
-          <p:cNvSpPr/>
-          <p:nvPr/>
-        </p:nvSpPr>
-        <p:spPr>
-          <a:xfrm>
-            <a:off x="7772400" y="1508760"/>
-            <a:ext cx="3867912" cy="4572000"/>
+            <a:off x="6233007" y="1600200"/>
+            <a:ext cx="5410047" cy="2148840"/>
           </a:xfrm>
           <a:prstGeom prst="roundRect">
             <a:avLst>
-              <a:gd name="adj" fmla="val 8000"/>
+              <a:gd name="adj" fmla="val 6000"/>
             </a:avLst>
           </a:prstGeom>
           <a:solidFill>
@@ -8201,14 +9817,67 @@
       </p:sp>
       <p:sp>
         <p:nvSpPr>
-          <p:cNvPr id="18" name="TextBox 17"/>
+          <p:cNvPr id="11" name="Oval 10"/>
+          <p:cNvSpPr/>
+          <p:nvPr/>
+        </p:nvSpPr>
+        <p:spPr>
+          <a:xfrm>
+            <a:off x="6461607" y="1828800"/>
+            <a:ext cx="457200" cy="457200"/>
+          </a:xfrm>
+          <a:prstGeom prst="ellipse">
+            <a:avLst/>
+          </a:prstGeom>
+          <a:solidFill>
+            <a:srgbClr val="E0463A"/>
+          </a:solidFill>
+          <a:ln>
+            <a:noFill/>
+          </a:ln>
+          <a:effectLst/>
+        </p:spPr>
+        <p:style>
+          <a:lnRef idx="1">
+            <a:schemeClr val="accent1"/>
+          </a:lnRef>
+          <a:fillRef idx="3">
+            <a:schemeClr val="accent1"/>
+          </a:fillRef>
+          <a:effectRef idx="2">
+            <a:schemeClr val="accent1"/>
+          </a:effectRef>
+          <a:fontRef idx="minor">
+            <a:schemeClr val="lt1"/>
+          </a:fontRef>
+        </p:style>
+        <p:txBody>
+          <a:bodyPr rtlCol="0" anchor="ctr" lIns="0" rIns="0" tIns="0" bIns="0"/>
+          <a:lstStyle/>
+          <a:p>
+            <a:pPr algn="ctr"/>
+            <a:r>
+              <a:rPr sz="1500" b="1">
+                <a:solidFill>
+                  <a:srgbClr val="FFFFFF"/>
+                </a:solidFill>
+                <a:latin typeface="Calibri"/>
+              </a:rPr>
+              <a:t>2</a:t>
+            </a:r>
+          </a:p>
+        </p:txBody>
+      </p:sp>
+      <p:sp>
+        <p:nvSpPr>
+          <p:cNvPr id="12" name="TextBox 11"/>
           <p:cNvSpPr txBox="1"/>
           <p:nvPr/>
         </p:nvSpPr>
         <p:spPr>
           <a:xfrm>
-            <a:off x="8046720" y="1737360"/>
-            <a:ext cx="3291840" cy="365760"/>
+            <a:off x="7055967" y="1801368"/>
+            <a:ext cx="4404207" cy="512064"/>
           </a:xfrm>
           <a:prstGeom prst="rect">
             <a:avLst/>
@@ -8216,32 +9885,162 @@
           <a:noFill/>
         </p:spPr>
         <p:txBody>
+          <a:bodyPr wrap="square" anchor="ctr" lIns="0" rIns="0" tIns="0" bIns="0"/>
+          <a:lstStyle/>
+          <a:p>
+            <a:pPr algn="l"/>
+            <a:r>
+              <a:rPr sz="1900" b="1" i="0">
+                <a:solidFill>
+                  <a:srgbClr val="03306E"/>
+                </a:solidFill>
+                <a:latin typeface="Calibri"/>
+              </a:rPr>
+              <a:t>Calculations</a:t>
+            </a:r>
+          </a:p>
+        </p:txBody>
+      </p:sp>
+      <p:sp>
+        <p:nvSpPr>
+          <p:cNvPr id="13" name="TextBox 12"/>
+          <p:cNvSpPr txBox="1"/>
+          <p:nvPr/>
+        </p:nvSpPr>
+        <p:spPr>
+          <a:xfrm>
+            <a:off x="6461607" y="2468880"/>
+            <a:ext cx="4952847" cy="1143000"/>
+          </a:xfrm>
+          <a:prstGeom prst="rect">
+            <a:avLst/>
+          </a:prstGeom>
+          <a:noFill/>
+        </p:spPr>
+        <p:txBody>
           <a:bodyPr wrap="square" anchor="t" lIns="0" rIns="0" tIns="0" bIns="0"/>
           <a:lstStyle/>
           <a:p>
             <a:pPr algn="l"/>
             <a:r>
-              <a:rPr sz="1300" b="1" i="0">
-                <a:solidFill>
-                  <a:srgbClr val="0645AD"/>
-                </a:solidFill>
-                <a:latin typeface="Calibri"/>
-              </a:rPr>
-              <a:t>SUCCESS CRITERIA</a:t>
-            </a:r>
-          </a:p>
-        </p:txBody>
-      </p:sp>
-      <p:sp>
-        <p:nvSpPr>
-          <p:cNvPr id="19" name="TextBox 18"/>
+              <a:rPr sz="2000" b="0" i="0">
+                <a:solidFill>
+                  <a:srgbClr val="202122"/>
+                </a:solidFill>
+                <a:latin typeface="Calibri"/>
+              </a:rPr>
+              <a:t>Check loads, stresses and performance.</a:t>
+            </a:r>
+          </a:p>
+        </p:txBody>
+      </p:sp>
+      <p:sp>
+        <p:nvSpPr>
+          <p:cNvPr id="14" name="Rounded Rectangle 13"/>
+          <p:cNvSpPr/>
+          <p:nvPr/>
+        </p:nvSpPr>
+        <p:spPr>
+          <a:xfrm>
+            <a:off x="548640" y="4023360"/>
+            <a:ext cx="5410047" cy="2148840"/>
+          </a:xfrm>
+          <a:prstGeom prst="roundRect">
+            <a:avLst>
+              <a:gd name="adj" fmla="val 6000"/>
+            </a:avLst>
+          </a:prstGeom>
+          <a:solidFill>
+            <a:srgbClr val="EAF3FF"/>
+          </a:solidFill>
+          <a:ln>
+            <a:noFill/>
+          </a:ln>
+          <a:effectLst/>
+        </p:spPr>
+        <p:style>
+          <a:lnRef idx="1">
+            <a:schemeClr val="accent1"/>
+          </a:lnRef>
+          <a:fillRef idx="3">
+            <a:schemeClr val="accent1"/>
+          </a:fillRef>
+          <a:effectRef idx="2">
+            <a:schemeClr val="accent1"/>
+          </a:effectRef>
+          <a:fontRef idx="minor">
+            <a:schemeClr val="lt1"/>
+          </a:fontRef>
+        </p:style>
+        <p:txBody>
+          <a:bodyPr rtlCol="0" anchor="ctr"/>
+          <a:lstStyle/>
+          <a:p/>
+        </p:txBody>
+      </p:sp>
+      <p:sp>
+        <p:nvSpPr>
+          <p:cNvPr id="15" name="Oval 14"/>
+          <p:cNvSpPr/>
+          <p:nvPr/>
+        </p:nvSpPr>
+        <p:spPr>
+          <a:xfrm>
+            <a:off x="777240" y="4251960"/>
+            <a:ext cx="457200" cy="457200"/>
+          </a:xfrm>
+          <a:prstGeom prst="ellipse">
+            <a:avLst/>
+          </a:prstGeom>
+          <a:solidFill>
+            <a:srgbClr val="E0463A"/>
+          </a:solidFill>
+          <a:ln>
+            <a:noFill/>
+          </a:ln>
+          <a:effectLst/>
+        </p:spPr>
+        <p:style>
+          <a:lnRef idx="1">
+            <a:schemeClr val="accent1"/>
+          </a:lnRef>
+          <a:fillRef idx="3">
+            <a:schemeClr val="accent1"/>
+          </a:fillRef>
+          <a:effectRef idx="2">
+            <a:schemeClr val="accent1"/>
+          </a:effectRef>
+          <a:fontRef idx="minor">
+            <a:schemeClr val="lt1"/>
+          </a:fontRef>
+        </p:style>
+        <p:txBody>
+          <a:bodyPr rtlCol="0" anchor="ctr" lIns="0" rIns="0" tIns="0" bIns="0"/>
+          <a:lstStyle/>
+          <a:p>
+            <a:pPr algn="ctr"/>
+            <a:r>
+              <a:rPr sz="1500" b="1">
+                <a:solidFill>
+                  <a:srgbClr val="FFFFFF"/>
+                </a:solidFill>
+                <a:latin typeface="Calibri"/>
+              </a:rPr>
+              <a:t>3</a:t>
+            </a:r>
+          </a:p>
+        </p:txBody>
+      </p:sp>
+      <p:sp>
+        <p:nvSpPr>
+          <p:cNvPr id="16" name="TextBox 15"/>
           <p:cNvSpPr txBox="1"/>
           <p:nvPr/>
         </p:nvSpPr>
         <p:spPr>
           <a:xfrm>
-            <a:off x="8046720" y="2240280"/>
-            <a:ext cx="3337560" cy="3657600"/>
+            <a:off x="1371600" y="4224528"/>
+            <a:ext cx="4404207" cy="512064"/>
           </a:xfrm>
           <a:prstGeom prst="rect">
             <a:avLst/>
@@ -8249,71 +10048,214 @@
           <a:noFill/>
         </p:spPr>
         <p:txBody>
-          <a:bodyPr wrap="square" lIns="0" rIns="0" tIns="0" bIns="0">
-            <a:spAutoFit/>
-          </a:bodyPr>
-          <a:lstStyle/>
-          <a:p>
-            <a:pPr marL="274320" indent="-274320">
-              <a:spcAft>
-                <a:spcPts val="810"/>
-              </a:spcAft>
-              <a:buClr>
-                <a:srgbClr val="0645AD"/>
-              </a:buClr>
-              <a:buFont typeface="Arial"/>
-              <a:buChar char="•"/>
-            </a:pPr>
-            <a:r>
-              <a:rPr sz="1800" b="0">
+          <a:bodyPr wrap="square" anchor="ctr" lIns="0" rIns="0" tIns="0" bIns="0"/>
+          <a:lstStyle/>
+          <a:p>
+            <a:pPr algn="l"/>
+            <a:r>
+              <a:rPr sz="1900" b="1" i="0">
+                <a:solidFill>
+                  <a:srgbClr val="03306E"/>
+                </a:solidFill>
+                <a:latin typeface="Calibri"/>
+              </a:rPr>
+              <a:t>CAD simulation</a:t>
+            </a:r>
+          </a:p>
+        </p:txBody>
+      </p:sp>
+      <p:sp>
+        <p:nvSpPr>
+          <p:cNvPr id="17" name="TextBox 16"/>
+          <p:cNvSpPr txBox="1"/>
+          <p:nvPr/>
+        </p:nvSpPr>
+        <p:spPr>
+          <a:xfrm>
+            <a:off x="777240" y="4892040"/>
+            <a:ext cx="4952847" cy="1143000"/>
+          </a:xfrm>
+          <a:prstGeom prst="rect">
+            <a:avLst/>
+          </a:prstGeom>
+          <a:noFill/>
+        </p:spPr>
+        <p:txBody>
+          <a:bodyPr wrap="square" anchor="t" lIns="0" rIns="0" tIns="0" bIns="0"/>
+          <a:lstStyle/>
+          <a:p>
+            <a:pPr algn="l"/>
+            <a:r>
+              <a:rPr sz="2000" b="0" i="0">
                 <a:solidFill>
                   <a:srgbClr val="202122"/>
                 </a:solidFill>
                 <a:latin typeface="Calibri"/>
               </a:rPr>
-              <a:t>Errors found and corrected</a:t>
-            </a:r>
-          </a:p>
-          <a:p>
-            <a:pPr marL="274320" indent="-274320">
-              <a:spcAft>
-                <a:spcPts val="810"/>
-              </a:spcAft>
-              <a:buClr>
-                <a:srgbClr val="0645AD"/>
-              </a:buClr>
-              <a:buFont typeface="Arial"/>
-              <a:buChar char="•"/>
-            </a:pPr>
-            <a:r>
-              <a:rPr sz="1800" b="0">
+              <a:t>Test the design virtually.</a:t>
+            </a:r>
+          </a:p>
+        </p:txBody>
+      </p:sp>
+      <p:sp>
+        <p:nvSpPr>
+          <p:cNvPr id="18" name="Rounded Rectangle 17"/>
+          <p:cNvSpPr/>
+          <p:nvPr/>
+        </p:nvSpPr>
+        <p:spPr>
+          <a:xfrm>
+            <a:off x="6233007" y="4023360"/>
+            <a:ext cx="5410047" cy="2148840"/>
+          </a:xfrm>
+          <a:prstGeom prst="roundRect">
+            <a:avLst>
+              <a:gd name="adj" fmla="val 6000"/>
+            </a:avLst>
+          </a:prstGeom>
+          <a:solidFill>
+            <a:srgbClr val="EAF3FF"/>
+          </a:solidFill>
+          <a:ln>
+            <a:noFill/>
+          </a:ln>
+          <a:effectLst/>
+        </p:spPr>
+        <p:style>
+          <a:lnRef idx="1">
+            <a:schemeClr val="accent1"/>
+          </a:lnRef>
+          <a:fillRef idx="3">
+            <a:schemeClr val="accent1"/>
+          </a:fillRef>
+          <a:effectRef idx="2">
+            <a:schemeClr val="accent1"/>
+          </a:effectRef>
+          <a:fontRef idx="minor">
+            <a:schemeClr val="lt1"/>
+          </a:fontRef>
+        </p:style>
+        <p:txBody>
+          <a:bodyPr rtlCol="0" anchor="ctr"/>
+          <a:lstStyle/>
+          <a:p/>
+        </p:txBody>
+      </p:sp>
+      <p:sp>
+        <p:nvSpPr>
+          <p:cNvPr id="19" name="Oval 18"/>
+          <p:cNvSpPr/>
+          <p:nvPr/>
+        </p:nvSpPr>
+        <p:spPr>
+          <a:xfrm>
+            <a:off x="6461607" y="4251960"/>
+            <a:ext cx="457200" cy="457200"/>
+          </a:xfrm>
+          <a:prstGeom prst="ellipse">
+            <a:avLst/>
+          </a:prstGeom>
+          <a:solidFill>
+            <a:srgbClr val="E0463A"/>
+          </a:solidFill>
+          <a:ln>
+            <a:noFill/>
+          </a:ln>
+          <a:effectLst/>
+        </p:spPr>
+        <p:style>
+          <a:lnRef idx="1">
+            <a:schemeClr val="accent1"/>
+          </a:lnRef>
+          <a:fillRef idx="3">
+            <a:schemeClr val="accent1"/>
+          </a:fillRef>
+          <a:effectRef idx="2">
+            <a:schemeClr val="accent1"/>
+          </a:effectRef>
+          <a:fontRef idx="minor">
+            <a:schemeClr val="lt1"/>
+          </a:fontRef>
+        </p:style>
+        <p:txBody>
+          <a:bodyPr rtlCol="0" anchor="ctr" lIns="0" rIns="0" tIns="0" bIns="0"/>
+          <a:lstStyle/>
+          <a:p>
+            <a:pPr algn="ctr"/>
+            <a:r>
+              <a:rPr sz="1500" b="1">
+                <a:solidFill>
+                  <a:srgbClr val="FFFFFF"/>
+                </a:solidFill>
+                <a:latin typeface="Calibri"/>
+              </a:rPr>
+              <a:t>4</a:t>
+            </a:r>
+          </a:p>
+        </p:txBody>
+      </p:sp>
+      <p:sp>
+        <p:nvSpPr>
+          <p:cNvPr id="20" name="TextBox 19"/>
+          <p:cNvSpPr txBox="1"/>
+          <p:nvPr/>
+        </p:nvSpPr>
+        <p:spPr>
+          <a:xfrm>
+            <a:off x="7055967" y="4224528"/>
+            <a:ext cx="4404207" cy="512064"/>
+          </a:xfrm>
+          <a:prstGeom prst="rect">
+            <a:avLst/>
+          </a:prstGeom>
+          <a:noFill/>
+        </p:spPr>
+        <p:txBody>
+          <a:bodyPr wrap="square" anchor="ctr" lIns="0" rIns="0" tIns="0" bIns="0"/>
+          <a:lstStyle/>
+          <a:p>
+            <a:pPr algn="l"/>
+            <a:r>
+              <a:rPr sz="1900" b="1" i="0">
+                <a:solidFill>
+                  <a:srgbClr val="03306E"/>
+                </a:solidFill>
+                <a:latin typeface="Calibri"/>
+              </a:rPr>
+              <a:t>Physical models</a:t>
+            </a:r>
+          </a:p>
+        </p:txBody>
+      </p:sp>
+      <p:sp>
+        <p:nvSpPr>
+          <p:cNvPr id="21" name="TextBox 20"/>
+          <p:cNvSpPr txBox="1"/>
+          <p:nvPr/>
+        </p:nvSpPr>
+        <p:spPr>
+          <a:xfrm>
+            <a:off x="6461607" y="4892040"/>
+            <a:ext cx="4952847" cy="1143000"/>
+          </a:xfrm>
+          <a:prstGeom prst="rect">
+            <a:avLst/>
+          </a:prstGeom>
+          <a:noFill/>
+        </p:spPr>
+        <p:txBody>
+          <a:bodyPr wrap="square" anchor="t" lIns="0" rIns="0" tIns="0" bIns="0"/>
+          <a:lstStyle/>
+          <a:p>
+            <a:pPr algn="l"/>
+            <a:r>
+              <a:rPr sz="2000" b="0" i="0">
                 <a:solidFill>
                   <a:srgbClr val="202122"/>
                 </a:solidFill>
                 <a:latin typeface="Calibri"/>
               </a:rPr>
-              <a:t>Escalation decisions justified</a:t>
-            </a:r>
-          </a:p>
-          <a:p>
-            <a:pPr marL="274320" indent="-274320">
-              <a:spcAft>
-                <a:spcPts val="810"/>
-              </a:spcAft>
-              <a:buClr>
-                <a:srgbClr val="0645AD"/>
-              </a:buClr>
-              <a:buFont typeface="Arial"/>
-              <a:buChar char="•"/>
-            </a:pPr>
-            <a:r>
-              <a:rPr sz="1800" b="0">
-                <a:solidFill>
-                  <a:srgbClr val="202122"/>
-                </a:solidFill>
-                <a:latin typeface="Calibri"/>
-              </a:rPr>
-              <a:t>Changes recorded</a:t>
+              <a:t>Check fit, form and function.</a:t>
             </a:r>
           </a:p>
         </p:txBody>
@@ -8332,7 +10274,7 @@
     <p:bg>
       <p:bgPr>
         <a:solidFill>
-          <a:srgbClr val="03306E"/>
+          <a:srgbClr val="FFFFFF"/>
         </a:solidFill>
         <a:effectLst/>
       </p:bgPr>
@@ -8368,7 +10310,7 @@
             <a:r>
               <a:rPr sz="1100" b="1" i="0">
                 <a:solidFill>
-                  <a:srgbClr val="A9C8F0"/>
+                  <a:srgbClr val="54595D"/>
                 </a:solidFill>
                 <a:latin typeface="Calibri"/>
               </a:rPr>
@@ -8401,24 +10343,90 @@
             <a:r>
               <a:rPr sz="3200" b="1" i="0">
                 <a:solidFill>
-                  <a:srgbClr val="FFFFFF"/>
+                  <a:srgbClr val="03306E"/>
                 </a:solidFill>
                 <a:latin typeface="Cambria"/>
               </a:rPr>
-              <a:t>Exit ticket</a:t>
-            </a:r>
-          </a:p>
-        </p:txBody>
-      </p:sp>
-      <p:sp>
-        <p:nvSpPr>
-          <p:cNvPr id="4" name="Oval 3"/>
+              <a:t>Quick check: Verifying design information</a:t>
+            </a:r>
+          </a:p>
+        </p:txBody>
+      </p:sp>
+      <p:sp>
+        <p:nvSpPr>
+          <p:cNvPr id="4" name="TextBox 3"/>
+          <p:cNvSpPr txBox="1"/>
+          <p:nvPr/>
+        </p:nvSpPr>
+        <p:spPr>
+          <a:xfrm>
+            <a:off x="548640" y="6446520"/>
+            <a:ext cx="8229600" cy="274320"/>
+          </a:xfrm>
+          <a:prstGeom prst="rect">
+            <a:avLst/>
+          </a:prstGeom>
+          <a:noFill/>
+        </p:spPr>
+        <p:txBody>
+          <a:bodyPr wrap="square" anchor="t" lIns="0" rIns="0" tIns="0" bIns="0"/>
+          <a:lstStyle/>
+          <a:p>
+            <a:pPr algn="l"/>
+            <a:r>
+              <a:rPr sz="1000" b="0" i="0">
+                <a:solidFill>
+                  <a:srgbClr val="54595D"/>
+                </a:solidFill>
+                <a:latin typeface="Calibri"/>
+              </a:rPr>
+              <a:t>Design and Development for Engineering and Manufacturing T Level  ·  Analysing Requirements and Design Information</a:t>
+            </a:r>
+          </a:p>
+        </p:txBody>
+      </p:sp>
+      <p:sp>
+        <p:nvSpPr>
+          <p:cNvPr id="5" name="TextBox 4"/>
+          <p:cNvSpPr txBox="1"/>
+          <p:nvPr/>
+        </p:nvSpPr>
+        <p:spPr>
+          <a:xfrm>
+            <a:off x="10728655" y="6446520"/>
+            <a:ext cx="914400" cy="274320"/>
+          </a:xfrm>
+          <a:prstGeom prst="rect">
+            <a:avLst/>
+          </a:prstGeom>
+          <a:noFill/>
+        </p:spPr>
+        <p:txBody>
+          <a:bodyPr wrap="square" anchor="t" lIns="0" rIns="0" tIns="0" bIns="0"/>
+          <a:lstStyle/>
+          <a:p>
+            <a:pPr algn="r"/>
+            <a:r>
+              <a:rPr sz="1000" b="0" i="0">
+                <a:solidFill>
+                  <a:srgbClr val="54595D"/>
+                </a:solidFill>
+                <a:latin typeface="Calibri"/>
+              </a:rPr>
+              <a:t>9</a:t>
+            </a:r>
+          </a:p>
+        </p:txBody>
+      </p:sp>
+      <p:sp>
+        <p:nvSpPr>
+          <p:cNvPr id="6" name="Oval 5"/>
           <p:cNvSpPr/>
           <p:nvPr/>
         </p:nvSpPr>
         <p:spPr>
           <a:xfrm>
-            <a:off x="548640" y="1737360"/>
+            <a:off x="548640" y="1691640"/>
             <a:ext cx="502920" cy="502920"/>
           </a:xfrm>
           <a:prstGeom prst="ellipse">
@@ -8452,7 +10460,7 @@
           <a:p>
             <a:pPr algn="ctr"/>
             <a:r>
-              <a:rPr sz="1700" b="1">
+              <a:rPr sz="1600" b="1">
                 <a:solidFill>
                   <a:srgbClr val="FFFFFF"/>
                 </a:solidFill>
@@ -8465,14 +10473,14 @@
       </p:sp>
       <p:sp>
         <p:nvSpPr>
-          <p:cNvPr id="5" name="TextBox 4"/>
+          <p:cNvPr id="7" name="TextBox 6"/>
           <p:cNvSpPr txBox="1"/>
           <p:nvPr/>
         </p:nvSpPr>
         <p:spPr>
           <a:xfrm>
-            <a:off x="1325880" y="1645920"/>
-            <a:ext cx="6583680" cy="822960"/>
+            <a:off x="1371600" y="1645920"/>
+            <a:ext cx="10271455" cy="1188720"/>
           </a:xfrm>
           <a:prstGeom prst="rect">
             <a:avLst/>
@@ -8480,31 +10488,31 @@
           <a:noFill/>
         </p:spPr>
         <p:txBody>
-          <a:bodyPr wrap="square" anchor="ctr" lIns="0" rIns="0" tIns="0" bIns="0"/>
+          <a:bodyPr wrap="square" anchor="t" lIns="0" rIns="0" tIns="0" bIns="0"/>
           <a:lstStyle/>
           <a:p>
             <a:pPr algn="l"/>
             <a:r>
-              <a:rPr sz="2000" b="0" i="0">
-                <a:solidFill>
-                  <a:srgbClr val="FFFFFF"/>
-                </a:solidFill>
-                <a:latin typeface="Calibri"/>
-              </a:rPr>
-              <a:t>Who should you tell about an error in a drawing?</a:t>
-            </a:r>
-          </a:p>
-        </p:txBody>
-      </p:sp>
-      <p:sp>
-        <p:nvSpPr>
-          <p:cNvPr id="6" name="Oval 5"/>
+              <a:rPr sz="2400" b="0" i="0">
+                <a:solidFill>
+                  <a:srgbClr val="202122"/>
+                </a:solidFill>
+                <a:latin typeface="Calibri"/>
+              </a:rPr>
+              <a:t>Name three ways to evaluate a design.</a:t>
+            </a:r>
+          </a:p>
+        </p:txBody>
+      </p:sp>
+      <p:sp>
+        <p:nvSpPr>
+          <p:cNvPr id="8" name="Oval 7"/>
           <p:cNvSpPr/>
           <p:nvPr/>
         </p:nvSpPr>
         <p:spPr>
           <a:xfrm>
-            <a:off x="548640" y="2697480"/>
+            <a:off x="548640" y="3108960"/>
             <a:ext cx="502920" cy="502920"/>
           </a:xfrm>
           <a:prstGeom prst="ellipse">
@@ -8538,7 +10546,7 @@
           <a:p>
             <a:pPr algn="ctr"/>
             <a:r>
-              <a:rPr sz="1700" b="1">
+              <a:rPr sz="1600" b="1">
                 <a:solidFill>
                   <a:srgbClr val="FFFFFF"/>
                 </a:solidFill>
@@ -8551,14 +10559,14 @@
       </p:sp>
       <p:sp>
         <p:nvSpPr>
-          <p:cNvPr id="7" name="TextBox 6"/>
+          <p:cNvPr id="9" name="TextBox 8"/>
           <p:cNvSpPr txBox="1"/>
           <p:nvPr/>
         </p:nvSpPr>
         <p:spPr>
           <a:xfrm>
-            <a:off x="1325880" y="2606040"/>
-            <a:ext cx="6583680" cy="822960"/>
+            <a:off x="1371600" y="3063240"/>
+            <a:ext cx="10271455" cy="1188720"/>
           </a:xfrm>
           <a:prstGeom prst="rect">
             <a:avLst/>
@@ -8566,31 +10574,31 @@
           <a:noFill/>
         </p:spPr>
         <p:txBody>
-          <a:bodyPr wrap="square" anchor="ctr" lIns="0" rIns="0" tIns="0" bIns="0"/>
+          <a:bodyPr wrap="square" anchor="t" lIns="0" rIns="0" tIns="0" bIns="0"/>
           <a:lstStyle/>
           <a:p>
             <a:pPr algn="l"/>
             <a:r>
-              <a:rPr sz="2000" b="0" i="0">
-                <a:solidFill>
-                  <a:srgbClr val="FFFFFF"/>
-                </a:solidFill>
-                <a:latin typeface="Calibri"/>
-              </a:rPr>
-              <a:t>How would you control scope creep?</a:t>
-            </a:r>
-          </a:p>
-        </p:txBody>
-      </p:sp>
-      <p:sp>
-        <p:nvSpPr>
-          <p:cNvPr id="8" name="Oval 7"/>
+              <a:rPr sz="2400" b="0" i="0">
+                <a:solidFill>
+                  <a:srgbClr val="202122"/>
+                </a:solidFill>
+                <a:latin typeface="Calibri"/>
+              </a:rPr>
+              <a:t>Why use more than one method?</a:t>
+            </a:r>
+          </a:p>
+        </p:txBody>
+      </p:sp>
+      <p:sp>
+        <p:nvSpPr>
+          <p:cNvPr id="10" name="Oval 9"/>
           <p:cNvSpPr/>
           <p:nvPr/>
         </p:nvSpPr>
         <p:spPr>
           <a:xfrm>
-            <a:off x="548640" y="3657600"/>
+            <a:off x="548640" y="4526280"/>
             <a:ext cx="502920" cy="502920"/>
           </a:xfrm>
           <a:prstGeom prst="ellipse">
@@ -8624,7 +10632,7 @@
           <a:p>
             <a:pPr algn="ctr"/>
             <a:r>
-              <a:rPr sz="1700" b="1">
+              <a:rPr sz="1600" b="1">
                 <a:solidFill>
                   <a:srgbClr val="FFFFFF"/>
                 </a:solidFill>
@@ -8633,83 +10641,6 @@
               <a:t>3</a:t>
             </a:r>
           </a:p>
-        </p:txBody>
-      </p:sp>
-      <p:sp>
-        <p:nvSpPr>
-          <p:cNvPr id="9" name="TextBox 8"/>
-          <p:cNvSpPr txBox="1"/>
-          <p:nvPr/>
-        </p:nvSpPr>
-        <p:spPr>
-          <a:xfrm>
-            <a:off x="1325880" y="3566160"/>
-            <a:ext cx="6583680" cy="822960"/>
-          </a:xfrm>
-          <a:prstGeom prst="rect">
-            <a:avLst/>
-          </a:prstGeom>
-          <a:noFill/>
-        </p:spPr>
-        <p:txBody>
-          <a:bodyPr wrap="square" anchor="ctr" lIns="0" rIns="0" tIns="0" bIns="0"/>
-          <a:lstStyle/>
-          <a:p>
-            <a:pPr algn="l"/>
-            <a:r>
-              <a:rPr sz="2000" b="0" i="0">
-                <a:solidFill>
-                  <a:srgbClr val="FFFFFF"/>
-                </a:solidFill>
-                <a:latin typeface="Calibri"/>
-              </a:rPr>
-              <a:t>Which verification method is cheapest?</a:t>
-            </a:r>
-          </a:p>
-        </p:txBody>
-      </p:sp>
-      <p:sp>
-        <p:nvSpPr>
-          <p:cNvPr id="10" name="Rounded Rectangle 9"/>
-          <p:cNvSpPr/>
-          <p:nvPr/>
-        </p:nvSpPr>
-        <p:spPr>
-          <a:xfrm>
-            <a:off x="8229600" y="1645920"/>
-            <a:ext cx="3410712" cy="2926080"/>
-          </a:xfrm>
-          <a:prstGeom prst="roundRect">
-            <a:avLst>
-              <a:gd name="adj" fmla="val 8000"/>
-            </a:avLst>
-          </a:prstGeom>
-          <a:solidFill>
-            <a:srgbClr val="0645AD"/>
-          </a:solidFill>
-          <a:ln>
-            <a:noFill/>
-          </a:ln>
-          <a:effectLst/>
-        </p:spPr>
-        <p:style>
-          <a:lnRef idx="1">
-            <a:schemeClr val="accent1"/>
-          </a:lnRef>
-          <a:fillRef idx="3">
-            <a:schemeClr val="accent1"/>
-          </a:fillRef>
-          <a:effectRef idx="2">
-            <a:schemeClr val="accent1"/>
-          </a:effectRef>
-          <a:fontRef idx="minor">
-            <a:schemeClr val="lt1"/>
-          </a:fontRef>
-        </p:style>
-        <p:txBody>
-          <a:bodyPr rtlCol="0" anchor="ctr"/>
-          <a:lstStyle/>
-          <a:p/>
         </p:txBody>
       </p:sp>
       <p:sp>
@@ -8720,8 +10651,8 @@
         </p:nvSpPr>
         <p:spPr>
           <a:xfrm>
-            <a:off x="8503920" y="1874519"/>
-            <a:ext cx="2926080" cy="365760"/>
+            <a:off x="1371600" y="4480560"/>
+            <a:ext cx="10271455" cy="1188720"/>
           </a:xfrm>
           <a:prstGeom prst="rect">
             <a:avLst/>
@@ -8734,13 +10665,13 @@
           <a:p>
             <a:pPr algn="l"/>
             <a:r>
-              <a:rPr sz="1300" b="1" i="0">
-                <a:solidFill>
-                  <a:srgbClr val="A9C8F0"/>
-                </a:solidFill>
-                <a:latin typeface="Calibri"/>
-              </a:rPr>
-              <a:t>REVISE THIS TOPIC</a:t>
+              <a:rPr sz="2400" b="0" i="0">
+                <a:solidFill>
+                  <a:srgbClr val="202122"/>
+                </a:solidFill>
+                <a:latin typeface="Calibri"/>
+              </a:rPr>
+              <a:t>What does a physical model check?</a:t>
             </a:r>
           </a:p>
         </p:txBody>
@@ -8753,8 +10684,8 @@
         </p:nvSpPr>
         <p:spPr>
           <a:xfrm>
-            <a:off x="8503920" y="2286000"/>
-            <a:ext cx="2926080" cy="548640"/>
+            <a:off x="548640" y="5852160"/>
+            <a:ext cx="11094415" cy="365760"/>
           </a:xfrm>
           <a:prstGeom prst="rect">
             <a:avLst/>
@@ -8767,79 +10698,13 @@
           <a:p>
             <a:pPr algn="l"/>
             <a:r>
-              <a:rPr sz="1400" b="0" i="0">
-                <a:solidFill>
-                  <a:srgbClr val="FFFFFF"/>
-                </a:solidFill>
-                <a:latin typeface="Calibri"/>
-              </a:rPr>
-              <a:t>Revision notes for this lesson are on the study wiki:</a:t>
-            </a:r>
-          </a:p>
-        </p:txBody>
-      </p:sp>
-      <p:sp>
-        <p:nvSpPr>
-          <p:cNvPr id="13" name="TextBox 12"/>
-          <p:cNvSpPr txBox="1"/>
-          <p:nvPr/>
-        </p:nvSpPr>
-        <p:spPr>
-          <a:xfrm>
-            <a:off x="8503920" y="2926080"/>
-            <a:ext cx="2926080" cy="1463040"/>
-          </a:xfrm>
-          <a:prstGeom prst="rect">
-            <a:avLst/>
-          </a:prstGeom>
-          <a:noFill/>
-        </p:spPr>
-        <p:txBody>
-          <a:bodyPr wrap="square" anchor="t" lIns="0" rIns="0" tIns="0" bIns="0"/>
-          <a:lstStyle/>
-          <a:p>
-            <a:pPr algn="l"/>
-            <a:r>
-              <a:rPr sz="2000" b="1" i="0">
-                <a:solidFill>
-                  <a:srgbClr val="FFFFFF"/>
-                </a:solidFill>
-                <a:latin typeface="Cambria"/>
-              </a:rPr>
-              <a:t>Practical Criteria</a:t>
-            </a:r>
-          </a:p>
-        </p:txBody>
-      </p:sp>
-      <p:sp>
-        <p:nvSpPr>
-          <p:cNvPr id="14" name="TextBox 13"/>
-          <p:cNvSpPr txBox="1"/>
-          <p:nvPr/>
-        </p:nvSpPr>
-        <p:spPr>
-          <a:xfrm>
-            <a:off x="548640" y="5669280"/>
-            <a:ext cx="11094415" cy="548640"/>
-          </a:xfrm>
-          <a:prstGeom prst="rect">
-            <a:avLst/>
-          </a:prstGeom>
-          <a:noFill/>
-        </p:spPr>
-        <p:txBody>
-          <a:bodyPr wrap="square" anchor="t" lIns="0" rIns="0" tIns="0" bIns="0"/>
-          <a:lstStyle/>
-          <a:p>
-            <a:pPr algn="l"/>
-            <a:r>
-              <a:rPr sz="1200" b="0" i="0">
-                <a:solidFill>
-                  <a:srgbClr val="A9C8F0"/>
-                </a:solidFill>
-                <a:latin typeface="Calibri"/>
-              </a:rPr>
-              <a:t>https://lana6478.github.io/T-level-Design-Development-Engineering-Manufacturing/#/02-occupational-specialism/02-practical-criteria.md</a:t>
+              <a:rPr sz="1300" b="0" i="1">
+                <a:solidFill>
+                  <a:srgbClr val="54595D"/>
+                </a:solidFill>
+                <a:latin typeface="Calibri"/>
+              </a:rPr>
+              <a:t>Answer on mini whiteboards or in your book. Answers are in the speaker notes.</a:t>
             </a:r>
           </a:p>
         </p:txBody>
